--- a/操作説明.pptx
+++ b/操作説明.pptx
@@ -244,7 +244,7 @@
           <a:p>
             <a:fld id="{2481FDF4-B71F-434F-B80C-6D5CDAFBF3C6}" type="datetimeFigureOut">
               <a:rPr kumimoji="1" lang="ja-JP" altLang="en-US" smtClean="0"/>
-              <a:t>2026/5/19</a:t>
+              <a:t>2026/6/30</a:t>
             </a:fld>
             <a:endParaRPr kumimoji="1" lang="ja-JP" altLang="en-US"/>
           </a:p>
@@ -446,7 +446,7 @@
           <a:p>
             <a:fld id="{2481FDF4-B71F-434F-B80C-6D5CDAFBF3C6}" type="datetimeFigureOut">
               <a:rPr kumimoji="1" lang="ja-JP" altLang="en-US" smtClean="0"/>
-              <a:t>2026/5/19</a:t>
+              <a:t>2026/6/30</a:t>
             </a:fld>
             <a:endParaRPr kumimoji="1" lang="ja-JP" altLang="en-US"/>
           </a:p>
@@ -658,7 +658,7 @@
           <a:p>
             <a:fld id="{2481FDF4-B71F-434F-B80C-6D5CDAFBF3C6}" type="datetimeFigureOut">
               <a:rPr kumimoji="1" lang="ja-JP" altLang="en-US" smtClean="0"/>
-              <a:t>2026/5/19</a:t>
+              <a:t>2026/6/30</a:t>
             </a:fld>
             <a:endParaRPr kumimoji="1" lang="ja-JP" altLang="en-US"/>
           </a:p>
@@ -860,7 +860,7 @@
           <a:p>
             <a:fld id="{2481FDF4-B71F-434F-B80C-6D5CDAFBF3C6}" type="datetimeFigureOut">
               <a:rPr kumimoji="1" lang="ja-JP" altLang="en-US" smtClean="0"/>
-              <a:t>2026/5/19</a:t>
+              <a:t>2026/6/30</a:t>
             </a:fld>
             <a:endParaRPr kumimoji="1" lang="ja-JP" altLang="en-US"/>
           </a:p>
@@ -1106,7 +1106,7 @@
           <a:p>
             <a:fld id="{2481FDF4-B71F-434F-B80C-6D5CDAFBF3C6}" type="datetimeFigureOut">
               <a:rPr kumimoji="1" lang="ja-JP" altLang="en-US" smtClean="0"/>
-              <a:t>2026/5/19</a:t>
+              <a:t>2026/6/30</a:t>
             </a:fld>
             <a:endParaRPr kumimoji="1" lang="ja-JP" altLang="en-US"/>
           </a:p>
@@ -1402,7 +1402,7 @@
           <a:p>
             <a:fld id="{2481FDF4-B71F-434F-B80C-6D5CDAFBF3C6}" type="datetimeFigureOut">
               <a:rPr kumimoji="1" lang="ja-JP" altLang="en-US" smtClean="0"/>
-              <a:t>2026/5/19</a:t>
+              <a:t>2026/6/30</a:t>
             </a:fld>
             <a:endParaRPr kumimoji="1" lang="ja-JP" altLang="en-US"/>
           </a:p>
@@ -1833,7 +1833,7 @@
           <a:p>
             <a:fld id="{2481FDF4-B71F-434F-B80C-6D5CDAFBF3C6}" type="datetimeFigureOut">
               <a:rPr kumimoji="1" lang="ja-JP" altLang="en-US" smtClean="0"/>
-              <a:t>2026/5/19</a:t>
+              <a:t>2026/6/30</a:t>
             </a:fld>
             <a:endParaRPr kumimoji="1" lang="ja-JP" altLang="en-US"/>
           </a:p>
@@ -1951,7 +1951,7 @@
           <a:p>
             <a:fld id="{2481FDF4-B71F-434F-B80C-6D5CDAFBF3C6}" type="datetimeFigureOut">
               <a:rPr kumimoji="1" lang="ja-JP" altLang="en-US" smtClean="0"/>
-              <a:t>2026/5/19</a:t>
+              <a:t>2026/6/30</a:t>
             </a:fld>
             <a:endParaRPr kumimoji="1" lang="ja-JP" altLang="en-US"/>
           </a:p>
@@ -2046,7 +2046,7 @@
           <a:p>
             <a:fld id="{2481FDF4-B71F-434F-B80C-6D5CDAFBF3C6}" type="datetimeFigureOut">
               <a:rPr kumimoji="1" lang="ja-JP" altLang="en-US" smtClean="0"/>
-              <a:t>2026/5/19</a:t>
+              <a:t>2026/6/30</a:t>
             </a:fld>
             <a:endParaRPr kumimoji="1" lang="ja-JP" altLang="en-US"/>
           </a:p>
@@ -2355,7 +2355,7 @@
           <a:p>
             <a:fld id="{2481FDF4-B71F-434F-B80C-6D5CDAFBF3C6}" type="datetimeFigureOut">
               <a:rPr kumimoji="1" lang="ja-JP" altLang="en-US" smtClean="0"/>
-              <a:t>2026/5/19</a:t>
+              <a:t>2026/6/30</a:t>
             </a:fld>
             <a:endParaRPr kumimoji="1" lang="ja-JP" altLang="en-US"/>
           </a:p>
@@ -2608,7 +2608,7 @@
           <a:p>
             <a:fld id="{2481FDF4-B71F-434F-B80C-6D5CDAFBF3C6}" type="datetimeFigureOut">
               <a:rPr kumimoji="1" lang="ja-JP" altLang="en-US" smtClean="0"/>
-              <a:t>2026/5/19</a:t>
+              <a:t>2026/6/30</a:t>
             </a:fld>
             <a:endParaRPr kumimoji="1" lang="ja-JP" altLang="en-US"/>
           </a:p>
@@ -2853,7 +2853,7 @@
           <a:p>
             <a:fld id="{2481FDF4-B71F-434F-B80C-6D5CDAFBF3C6}" type="datetimeFigureOut">
               <a:rPr kumimoji="1" lang="ja-JP" altLang="en-US" smtClean="0"/>
-              <a:t>2026/5/19</a:t>
+              <a:t>2026/6/30</a:t>
             </a:fld>
             <a:endParaRPr kumimoji="1" lang="ja-JP" altLang="en-US"/>
           </a:p>
@@ -4358,43 +4358,7 @@
         </p:nvCxnSpPr>
         <p:spPr>
           <a:xfrm>
-            <a:off x="6000681" y="2986598"/>
-            <a:ext cx="4162494" cy="0"/>
-          </a:xfrm>
-          <a:prstGeom prst="line">
-            <a:avLst/>
-          </a:prstGeom>
-          <a:ln w="12700">
-            <a:solidFill>
-              <a:srgbClr val="66AA59"/>
-            </a:solidFill>
-            <a:prstDash val="sysDash"/>
-          </a:ln>
-        </p:spPr>
-        <p:style>
-          <a:lnRef idx="1">
-            <a:schemeClr val="accent1"/>
-          </a:lnRef>
-          <a:fillRef idx="0">
-            <a:schemeClr val="accent1"/>
-          </a:fillRef>
-          <a:effectRef idx="0">
-            <a:schemeClr val="accent1"/>
-          </a:effectRef>
-          <a:fontRef idx="minor">
-            <a:schemeClr val="tx1"/>
-          </a:fontRef>
-        </p:style>
-      </p:cxnSp>
-      <p:cxnSp>
-        <p:nvCxnSpPr>
-          <p:cNvPr id="64" name="直線コネクタ 63"/>
-          <p:cNvCxnSpPr/>
-          <p:nvPr/>
-        </p:nvCxnSpPr>
-        <p:spPr>
-          <a:xfrm>
-            <a:off x="6000681" y="4223917"/>
+            <a:off x="6000681" y="3120822"/>
             <a:ext cx="4162494" cy="0"/>
           </a:xfrm>
           <a:prstGeom prst="line">
@@ -4466,8 +4430,8 @@
         </p:nvSpPr>
         <p:spPr>
           <a:xfrm>
-            <a:off x="6044444" y="1866175"/>
-            <a:ext cx="3744982" cy="369332"/>
+            <a:off x="5918609" y="1866175"/>
+            <a:ext cx="4577418" cy="1754326"/>
           </a:xfrm>
           <a:prstGeom prst="rect">
             <a:avLst/>
@@ -4482,236 +4446,52 @@
           <a:p>
             <a:r>
               <a:rPr kumimoji="1" lang="ja-JP" altLang="en-US" b="1" dirty="0" smtClean="0"/>
-              <a:t>ダッシュは</a:t>
-            </a:r>
-            <a:r>
-              <a:rPr kumimoji="1" lang="ja-JP" altLang="en-US" b="1" dirty="0" smtClean="0">
-                <a:solidFill>
-                  <a:srgbClr val="168812"/>
-                </a:solidFill>
-              </a:rPr>
-              <a:t>スタミナ</a:t>
-            </a:r>
-            <a:r>
-              <a:rPr kumimoji="1" lang="ja-JP" altLang="en-US" b="1" dirty="0" smtClean="0"/>
-              <a:t>を消費する</a:t>
+              <a:t>・ダッシュはスタミナを消費する</a:t>
             </a:r>
             <a:endParaRPr kumimoji="1" lang="en-US" altLang="ja-JP" b="1" dirty="0" smtClean="0"/>
           </a:p>
-        </p:txBody>
-      </p:sp>
-      <p:sp>
-        <p:nvSpPr>
-          <p:cNvPr id="67" name="テキスト ボックス 66"/>
-          <p:cNvSpPr txBox="1"/>
-          <p:nvPr/>
-        </p:nvSpPr>
-        <p:spPr>
-          <a:xfrm>
-            <a:off x="6099239" y="2252566"/>
-            <a:ext cx="4111561" cy="584775"/>
-          </a:xfrm>
-          <a:prstGeom prst="rect">
-            <a:avLst/>
-          </a:prstGeom>
-          <a:noFill/>
-        </p:spPr>
-        <p:txBody>
-          <a:bodyPr wrap="square" rtlCol="0">
-            <a:spAutoFit/>
-          </a:bodyPr>
-          <a:lstStyle/>
-          <a:p>
-            <a:r>
-              <a:rPr lang="en-US" altLang="ja-JP" sz="1600" b="1" dirty="0" smtClean="0"/>
-              <a:t>Shift</a:t>
-            </a:r>
-            <a:r>
-              <a:rPr lang="ja-JP" altLang="en-US" sz="1600" b="1" dirty="0" smtClean="0"/>
-              <a:t>を押している間、スタミナを消費してダッシュします。</a:t>
-            </a:r>
-            <a:endParaRPr kumimoji="1" lang="ja-JP" altLang="en-US" sz="1600" b="1" dirty="0"/>
-          </a:p>
-        </p:txBody>
-      </p:sp>
-      <p:sp>
-        <p:nvSpPr>
-          <p:cNvPr id="68" name="テキスト ボックス 67"/>
-          <p:cNvSpPr txBox="1"/>
-          <p:nvPr/>
-        </p:nvSpPr>
-        <p:spPr>
-          <a:xfrm>
-            <a:off x="6044445" y="3119811"/>
-            <a:ext cx="4312406" cy="369332"/>
-          </a:xfrm>
-          <a:prstGeom prst="rect">
-            <a:avLst/>
-          </a:prstGeom>
-          <a:noFill/>
-        </p:spPr>
-        <p:txBody>
-          <a:bodyPr wrap="square" rtlCol="0">
-            <a:spAutoFit/>
-          </a:bodyPr>
-          <a:lstStyle/>
-          <a:p>
-            <a:r>
-              <a:rPr kumimoji="1" lang="ja-JP" altLang="en-US" b="1" dirty="0" smtClean="0"/>
-              <a:t>スタミナは時間経過で少しずつ</a:t>
-            </a:r>
-            <a:r>
-              <a:rPr kumimoji="1" lang="ja-JP" altLang="en-US" b="1" dirty="0" smtClean="0">
-                <a:solidFill>
-                  <a:srgbClr val="168812"/>
-                </a:solidFill>
-              </a:rPr>
-              <a:t>回復する</a:t>
-            </a:r>
+          <a:p>
+            <a:r>
+              <a:rPr lang="ja-JP" altLang="en-US" b="1" dirty="0" smtClean="0"/>
+              <a:t>・</a:t>
+            </a:r>
+            <a:r>
+              <a:rPr lang="ja-JP" altLang="en-US" b="1" dirty="0"/>
+              <a:t>スタミナは時間経過で少しずつ回復</a:t>
+            </a:r>
+            <a:r>
+              <a:rPr lang="ja-JP" altLang="en-US" b="1" dirty="0" smtClean="0"/>
+              <a:t>する</a:t>
+            </a:r>
+            <a:endParaRPr lang="en-US" altLang="ja-JP" b="1" dirty="0" smtClean="0"/>
+          </a:p>
+          <a:p>
+            <a:r>
+              <a:rPr lang="ja-JP" altLang="en-US" b="1" dirty="0" smtClean="0"/>
+              <a:t>・</a:t>
+            </a:r>
+            <a:r>
+              <a:rPr lang="ja-JP" altLang="en-US" b="1" dirty="0"/>
+              <a:t>スタミナが０になると</a:t>
+            </a:r>
+            <a:endParaRPr lang="en-US" altLang="ja-JP" b="1" dirty="0"/>
+          </a:p>
+          <a:p>
+            <a:r>
+              <a:rPr lang="ja-JP" altLang="en-US" b="1" dirty="0" smtClean="0"/>
+              <a:t>　全回復</a:t>
+            </a:r>
+            <a:r>
+              <a:rPr lang="ja-JP" altLang="en-US" b="1" dirty="0"/>
+              <a:t>するまで移動操作ができなくなる</a:t>
+            </a:r>
+            <a:endParaRPr lang="en-US" altLang="ja-JP" b="1" dirty="0"/>
+          </a:p>
+          <a:p>
+            <a:endParaRPr lang="en-US" altLang="ja-JP" b="1" dirty="0"/>
+          </a:p>
+          <a:p>
             <a:endParaRPr kumimoji="1" lang="en-US" altLang="ja-JP" b="1" dirty="0" smtClean="0"/>
-          </a:p>
-        </p:txBody>
-      </p:sp>
-      <p:sp>
-        <p:nvSpPr>
-          <p:cNvPr id="69" name="テキスト ボックス 68"/>
-          <p:cNvSpPr txBox="1"/>
-          <p:nvPr/>
-        </p:nvSpPr>
-        <p:spPr>
-          <a:xfrm>
-            <a:off x="6099239" y="3522971"/>
-            <a:ext cx="3254311" cy="584775"/>
-          </a:xfrm>
-          <a:prstGeom prst="rect">
-            <a:avLst/>
-          </a:prstGeom>
-          <a:noFill/>
-        </p:spPr>
-        <p:txBody>
-          <a:bodyPr wrap="square" rtlCol="0">
-            <a:spAutoFit/>
-          </a:bodyPr>
-          <a:lstStyle/>
-          <a:p>
-            <a:r>
-              <a:rPr lang="ja-JP" altLang="en-US" sz="1600" b="1" dirty="0" smtClean="0"/>
-              <a:t>スタミナは、時間の経過とともに</a:t>
-            </a:r>
-            <a:endParaRPr lang="en-US" altLang="ja-JP" sz="1600" b="1" dirty="0" smtClean="0"/>
-          </a:p>
-          <a:p>
-            <a:r>
-              <a:rPr kumimoji="1" lang="ja-JP" altLang="en-US" sz="1600" b="1" dirty="0"/>
-              <a:t>自動で回復</a:t>
-            </a:r>
-            <a:r>
-              <a:rPr kumimoji="1" lang="ja-JP" altLang="en-US" sz="1600" b="1" dirty="0" smtClean="0"/>
-              <a:t>します。</a:t>
-            </a:r>
-            <a:endParaRPr kumimoji="1" lang="ja-JP" altLang="en-US" sz="1600" b="1" dirty="0"/>
-          </a:p>
-        </p:txBody>
-      </p:sp>
-      <p:sp>
-        <p:nvSpPr>
-          <p:cNvPr id="70" name="テキスト ボックス 69"/>
-          <p:cNvSpPr txBox="1"/>
-          <p:nvPr/>
-        </p:nvSpPr>
-        <p:spPr>
-          <a:xfrm>
-            <a:off x="6044445" y="4399876"/>
-            <a:ext cx="3848856" cy="646331"/>
-          </a:xfrm>
-          <a:prstGeom prst="rect">
-            <a:avLst/>
-          </a:prstGeom>
-          <a:noFill/>
-        </p:spPr>
-        <p:txBody>
-          <a:bodyPr wrap="square" rtlCol="0">
-            <a:spAutoFit/>
-          </a:bodyPr>
-          <a:lstStyle/>
-          <a:p>
-            <a:r>
-              <a:rPr kumimoji="1" lang="ja-JP" altLang="en-US" b="1" dirty="0" smtClean="0"/>
-              <a:t>スタミナが</a:t>
-            </a:r>
-            <a:r>
-              <a:rPr kumimoji="1" lang="ja-JP" altLang="en-US" b="1" dirty="0" smtClean="0">
-                <a:solidFill>
-                  <a:srgbClr val="D20608"/>
-                </a:solidFill>
-              </a:rPr>
-              <a:t>０</a:t>
-            </a:r>
-            <a:r>
-              <a:rPr kumimoji="1" lang="ja-JP" altLang="en-US" b="1" dirty="0" smtClean="0"/>
-              <a:t>になると</a:t>
-            </a:r>
-            <a:endParaRPr kumimoji="1" lang="en-US" altLang="ja-JP" b="1" dirty="0" smtClean="0"/>
-          </a:p>
-          <a:p>
-            <a:r>
-              <a:rPr lang="ja-JP" altLang="en-US" b="1" dirty="0">
-                <a:solidFill>
-                  <a:srgbClr val="D20608"/>
-                </a:solidFill>
-              </a:rPr>
-              <a:t>全回復するまで操作ができなく</a:t>
-            </a:r>
-            <a:r>
-              <a:rPr lang="ja-JP" altLang="en-US" b="1" dirty="0" smtClean="0">
-                <a:solidFill>
-                  <a:srgbClr val="D20608"/>
-                </a:solidFill>
-              </a:rPr>
-              <a:t>なる</a:t>
-            </a:r>
-            <a:endParaRPr kumimoji="1" lang="en-US" altLang="ja-JP" b="1" dirty="0" smtClean="0">
-              <a:solidFill>
-                <a:srgbClr val="D20608"/>
-              </a:solidFill>
-            </a:endParaRPr>
-          </a:p>
-        </p:txBody>
-      </p:sp>
-      <p:sp>
-        <p:nvSpPr>
-          <p:cNvPr id="71" name="テキスト ボックス 70"/>
-          <p:cNvSpPr txBox="1"/>
-          <p:nvPr/>
-        </p:nvSpPr>
-        <p:spPr>
-          <a:xfrm>
-            <a:off x="6099239" y="5046207"/>
-            <a:ext cx="3866847" cy="584775"/>
-          </a:xfrm>
-          <a:prstGeom prst="rect">
-            <a:avLst/>
-          </a:prstGeom>
-          <a:noFill/>
-        </p:spPr>
-        <p:txBody>
-          <a:bodyPr wrap="square" rtlCol="0">
-            <a:spAutoFit/>
-          </a:bodyPr>
-          <a:lstStyle/>
-          <a:p>
-            <a:r>
-              <a:rPr lang="ja-JP" altLang="en-US" sz="1600" b="1" dirty="0" smtClean="0"/>
-              <a:t>スタミナが０になると、全回復するまで</a:t>
-            </a:r>
-            <a:endParaRPr lang="en-US" altLang="ja-JP" sz="1600" b="1" dirty="0" smtClean="0"/>
-          </a:p>
-          <a:p>
-            <a:r>
-              <a:rPr kumimoji="1" lang="ja-JP" altLang="en-US" sz="1600" b="1" dirty="0" smtClean="0"/>
-              <a:t>プレイヤーの操作ができなくなります。</a:t>
-            </a:r>
-            <a:endParaRPr kumimoji="1" lang="ja-JP" altLang="en-US" sz="1600" b="1" dirty="0"/>
           </a:p>
         </p:txBody>
       </p:sp>
@@ -4723,8 +4503,8 @@
         </p:nvGrpSpPr>
         <p:grpSpPr>
           <a:xfrm>
-            <a:off x="3356043" y="122458"/>
-            <a:ext cx="5479915" cy="939893"/>
+            <a:off x="4442194" y="122458"/>
+            <a:ext cx="3307613" cy="939893"/>
             <a:chOff x="3356043" y="122458"/>
             <a:chExt cx="5479915" cy="939893"/>
           </a:xfrm>
@@ -4799,14 +4579,15 @@
             </a:bodyPr>
             <a:lstStyle/>
             <a:p>
+              <a:pPr algn="ctr"/>
               <a:r>
-                <a:rPr kumimoji="1" lang="ja-JP" altLang="en-US" sz="5400" b="1" dirty="0" smtClean="0">
+                <a:rPr lang="ja-JP" altLang="en-US" sz="5400" b="1" dirty="0">
                   <a:ln w="22225">
                     <a:noFill/>
                     <a:prstDash val="solid"/>
                   </a:ln>
                 </a:rPr>
-                <a:t>操作方法＆説明</a:t>
+                <a:t>遊び方</a:t>
               </a:r>
               <a:endParaRPr kumimoji="1" lang="ja-JP" altLang="en-US" sz="5400" b="1" dirty="0">
                 <a:ln w="22225">
@@ -4818,6 +4599,190 @@
           </p:txBody>
         </p:sp>
       </p:grpSp>
+      <p:sp>
+        <p:nvSpPr>
+          <p:cNvPr id="35" name="テキスト ボックス 34"/>
+          <p:cNvSpPr txBox="1"/>
+          <p:nvPr/>
+        </p:nvSpPr>
+        <p:spPr>
+          <a:xfrm>
+            <a:off x="5859885" y="3778826"/>
+            <a:ext cx="4627751" cy="2308324"/>
+          </a:xfrm>
+          <a:prstGeom prst="rect">
+            <a:avLst/>
+          </a:prstGeom>
+          <a:noFill/>
+        </p:spPr>
+        <p:txBody>
+          <a:bodyPr wrap="square" rtlCol="0">
+            <a:spAutoFit/>
+          </a:bodyPr>
+          <a:lstStyle>
+            <a:defPPr>
+              <a:defRPr lang="ja-JP"/>
+            </a:defPPr>
+            <a:lvl1pPr>
+              <a:defRPr b="1"/>
+            </a:lvl1pPr>
+          </a:lstStyle>
+          <a:p>
+            <a:r>
+              <a:rPr lang="ja-JP" altLang="en-US" sz="1600" dirty="0"/>
+              <a:t>自転車を操作し、プレイヤーを落とさず</a:t>
+            </a:r>
+            <a:r>
+              <a:rPr lang="ja-JP" altLang="en-US" sz="1600" dirty="0" smtClean="0"/>
+              <a:t>に</a:t>
+            </a:r>
+            <a:endParaRPr lang="en-US" altLang="ja-JP" sz="1600" dirty="0" smtClean="0"/>
+          </a:p>
+          <a:p>
+            <a:r>
+              <a:rPr lang="ja-JP" altLang="en-US" sz="1600" dirty="0" smtClean="0"/>
+              <a:t>ギミック</a:t>
+            </a:r>
+            <a:r>
+              <a:rPr lang="ja-JP" altLang="en-US" sz="1600" dirty="0"/>
+              <a:t>を突破</a:t>
+            </a:r>
+            <a:r>
+              <a:rPr lang="ja-JP" altLang="en-US" sz="1600" dirty="0" smtClean="0"/>
+              <a:t>して</a:t>
+            </a:r>
+            <a:endParaRPr lang="en-US" altLang="ja-JP" sz="1600" dirty="0" smtClean="0"/>
+          </a:p>
+          <a:p>
+            <a:r>
+              <a:rPr lang="ja-JP" altLang="en-US" sz="1600" dirty="0" smtClean="0"/>
+              <a:t>ゴール</a:t>
+            </a:r>
+            <a:r>
+              <a:rPr lang="ja-JP" altLang="en-US" sz="1600" dirty="0"/>
+              <a:t>を</a:t>
+            </a:r>
+            <a:r>
+              <a:rPr lang="ja-JP" altLang="en-US" sz="1600" dirty="0" smtClean="0"/>
+              <a:t>目指すアクションゲーム。</a:t>
+            </a:r>
+            <a:endParaRPr lang="en-US" altLang="ja-JP" sz="1600" dirty="0" smtClean="0"/>
+          </a:p>
+          <a:p>
+            <a:r>
+              <a:rPr lang="ja-JP" altLang="en-US" sz="1600" dirty="0" smtClean="0"/>
+              <a:t>プレイヤー</a:t>
+            </a:r>
+            <a:r>
+              <a:rPr lang="ja-JP" altLang="en-US" sz="1600" dirty="0"/>
+              <a:t>がゴールラインを越える</a:t>
+            </a:r>
+            <a:r>
+              <a:rPr lang="ja-JP" altLang="en-US" sz="1600" dirty="0" smtClean="0"/>
+              <a:t>と</a:t>
+            </a:r>
+            <a:endParaRPr lang="en-US" altLang="ja-JP" sz="1600" dirty="0" smtClean="0"/>
+          </a:p>
+          <a:p>
+            <a:r>
+              <a:rPr lang="ja-JP" altLang="en-US" sz="1600" dirty="0" smtClean="0"/>
+              <a:t>クリア</a:t>
+            </a:r>
+            <a:r>
+              <a:rPr lang="ja-JP" altLang="en-US" sz="1600" dirty="0"/>
+              <a:t>となり、赤い床や天井に触れる</a:t>
+            </a:r>
+            <a:r>
+              <a:rPr lang="ja-JP" altLang="en-US" sz="1600" dirty="0" smtClean="0"/>
+              <a:t>、</a:t>
+            </a:r>
+            <a:endParaRPr lang="en-US" altLang="ja-JP" sz="1600" dirty="0" smtClean="0"/>
+          </a:p>
+          <a:p>
+            <a:r>
+              <a:rPr lang="ja-JP" altLang="en-US" sz="1600" dirty="0" smtClean="0"/>
+              <a:t>プレイヤー</a:t>
+            </a:r>
+            <a:r>
+              <a:rPr lang="ja-JP" altLang="en-US" sz="1600" dirty="0"/>
+              <a:t>が落下する</a:t>
+            </a:r>
+            <a:r>
+              <a:rPr lang="ja-JP" altLang="en-US" sz="1600" dirty="0" smtClean="0"/>
+              <a:t>、</a:t>
+            </a:r>
+            <a:endParaRPr lang="en-US" altLang="ja-JP" sz="1600" dirty="0"/>
+          </a:p>
+          <a:p>
+            <a:r>
+              <a:rPr lang="ja-JP" altLang="en-US" sz="1600" dirty="0" smtClean="0"/>
+              <a:t>また</a:t>
+            </a:r>
+            <a:r>
+              <a:rPr lang="ja-JP" altLang="en-US" sz="1600" dirty="0"/>
+              <a:t>は時間切れになるとゲームオーバーとなる。</a:t>
+            </a:r>
+          </a:p>
+          <a:p>
+            <a:endParaRPr lang="en-US" altLang="ja-JP" sz="1600" dirty="0"/>
+          </a:p>
+          <a:p>
+            <a:endParaRPr lang="en-US" altLang="ja-JP" sz="1600" dirty="0"/>
+          </a:p>
+        </p:txBody>
+      </p:sp>
+      <p:sp>
+        <p:nvSpPr>
+          <p:cNvPr id="36" name="角丸四角形 35"/>
+          <p:cNvSpPr/>
+          <p:nvPr/>
+        </p:nvSpPr>
+        <p:spPr>
+          <a:xfrm>
+            <a:off x="7214533" y="3257725"/>
+            <a:ext cx="1644241" cy="360727"/>
+          </a:xfrm>
+          <a:prstGeom prst="roundRect">
+            <a:avLst>
+              <a:gd name="adj" fmla="val 50000"/>
+            </a:avLst>
+          </a:prstGeom>
+          <a:solidFill>
+            <a:srgbClr val="025228"/>
+          </a:solidFill>
+          <a:ln>
+            <a:noFill/>
+          </a:ln>
+        </p:spPr>
+        <p:style>
+          <a:lnRef idx="2">
+            <a:schemeClr val="accent1">
+              <a:shade val="50000"/>
+            </a:schemeClr>
+          </a:lnRef>
+          <a:fillRef idx="1">
+            <a:schemeClr val="accent1"/>
+          </a:fillRef>
+          <a:effectRef idx="0">
+            <a:schemeClr val="accent1"/>
+          </a:effectRef>
+          <a:fontRef idx="minor">
+            <a:schemeClr val="lt1"/>
+          </a:fontRef>
+        </p:style>
+        <p:txBody>
+          <a:bodyPr rtlCol="0" anchor="ctr"/>
+          <a:lstStyle/>
+          <a:p>
+            <a:pPr algn="ctr"/>
+            <a:r>
+              <a:rPr lang="ja-JP" altLang="en-US" sz="2000" b="1" dirty="0" smtClean="0"/>
+              <a:t>ゲーム内容</a:t>
+            </a:r>
+            <a:endParaRPr kumimoji="1" lang="ja-JP" altLang="en-US" sz="2000" b="1" dirty="0"/>
+          </a:p>
+        </p:txBody>
+      </p:sp>
     </p:spTree>
     <p:extLst>
       <p:ext uri="{BB962C8B-B14F-4D97-AF65-F5344CB8AC3E}">

--- a/操作説明.pptx
+++ b/操作説明.pptx
@@ -3440,1061 +3440,6 @@
           <a:chExt cx="0" cy="0"/>
         </a:xfrm>
       </p:grpSpPr>
-      <p:sp>
-        <p:nvSpPr>
-          <p:cNvPr id="6" name="角丸四角形 5"/>
-          <p:cNvSpPr/>
-          <p:nvPr/>
-        </p:nvSpPr>
-        <p:spPr>
-          <a:xfrm>
-            <a:off x="1704363" y="1140903"/>
-            <a:ext cx="8783274" cy="4706224"/>
-          </a:xfrm>
-          <a:prstGeom prst="roundRect">
-            <a:avLst>
-              <a:gd name="adj" fmla="val 5615"/>
-            </a:avLst>
-          </a:prstGeom>
-          <a:solidFill>
-            <a:schemeClr val="bg1"/>
-          </a:solidFill>
-          <a:ln w="38100">
-            <a:solidFill>
-              <a:srgbClr val="054C23"/>
-            </a:solidFill>
-          </a:ln>
-        </p:spPr>
-        <p:style>
-          <a:lnRef idx="2">
-            <a:schemeClr val="accent1">
-              <a:shade val="50000"/>
-            </a:schemeClr>
-          </a:lnRef>
-          <a:fillRef idx="1">
-            <a:schemeClr val="accent1"/>
-          </a:fillRef>
-          <a:effectRef idx="0">
-            <a:schemeClr val="accent1"/>
-          </a:effectRef>
-          <a:fontRef idx="minor">
-            <a:schemeClr val="lt1"/>
-          </a:fontRef>
-        </p:style>
-        <p:txBody>
-          <a:bodyPr rtlCol="0" anchor="ctr"/>
-          <a:lstStyle/>
-          <a:p>
-            <a:pPr algn="ctr"/>
-            <a:endParaRPr kumimoji="1" lang="ja-JP" altLang="en-US"/>
-          </a:p>
-        </p:txBody>
-      </p:sp>
-      <p:sp>
-        <p:nvSpPr>
-          <p:cNvPr id="7" name="角丸四角形 6"/>
-          <p:cNvSpPr/>
-          <p:nvPr/>
-        </p:nvSpPr>
-        <p:spPr>
-          <a:xfrm>
-            <a:off x="2768367" y="1342238"/>
-            <a:ext cx="1853967" cy="360727"/>
-          </a:xfrm>
-          <a:prstGeom prst="roundRect">
-            <a:avLst>
-              <a:gd name="adj" fmla="val 50000"/>
-            </a:avLst>
-          </a:prstGeom>
-          <a:solidFill>
-            <a:srgbClr val="025228"/>
-          </a:solidFill>
-          <a:ln>
-            <a:noFill/>
-          </a:ln>
-        </p:spPr>
-        <p:style>
-          <a:lnRef idx="2">
-            <a:schemeClr val="accent1">
-              <a:shade val="50000"/>
-            </a:schemeClr>
-          </a:lnRef>
-          <a:fillRef idx="1">
-            <a:schemeClr val="accent1"/>
-          </a:fillRef>
-          <a:effectRef idx="0">
-            <a:schemeClr val="accent1"/>
-          </a:effectRef>
-          <a:fontRef idx="minor">
-            <a:schemeClr val="lt1"/>
-          </a:fontRef>
-        </p:style>
-        <p:txBody>
-          <a:bodyPr rtlCol="0" anchor="ctr"/>
-          <a:lstStyle/>
-          <a:p>
-            <a:pPr algn="ctr"/>
-            <a:r>
-              <a:rPr kumimoji="1" lang="ja-JP" altLang="en-US" sz="2000" b="1" dirty="0" smtClean="0"/>
-              <a:t>操作方法</a:t>
-            </a:r>
-            <a:endParaRPr kumimoji="1" lang="ja-JP" altLang="en-US" sz="2000" b="1" dirty="0"/>
-          </a:p>
-        </p:txBody>
-      </p:sp>
-      <p:sp>
-        <p:nvSpPr>
-          <p:cNvPr id="8" name="角丸四角形 7"/>
-          <p:cNvSpPr/>
-          <p:nvPr/>
-        </p:nvSpPr>
-        <p:spPr>
-          <a:xfrm>
-            <a:off x="7214533" y="1342238"/>
-            <a:ext cx="1644241" cy="360727"/>
-          </a:xfrm>
-          <a:prstGeom prst="roundRect">
-            <a:avLst>
-              <a:gd name="adj" fmla="val 50000"/>
-            </a:avLst>
-          </a:prstGeom>
-          <a:solidFill>
-            <a:srgbClr val="025228"/>
-          </a:solidFill>
-          <a:ln>
-            <a:noFill/>
-          </a:ln>
-        </p:spPr>
-        <p:style>
-          <a:lnRef idx="2">
-            <a:schemeClr val="accent1">
-              <a:shade val="50000"/>
-            </a:schemeClr>
-          </a:lnRef>
-          <a:fillRef idx="1">
-            <a:schemeClr val="accent1"/>
-          </a:fillRef>
-          <a:effectRef idx="0">
-            <a:schemeClr val="accent1"/>
-          </a:effectRef>
-          <a:fontRef idx="minor">
-            <a:schemeClr val="lt1"/>
-          </a:fontRef>
-        </p:style>
-        <p:txBody>
-          <a:bodyPr rtlCol="0" anchor="ctr"/>
-          <a:lstStyle/>
-          <a:p>
-            <a:pPr algn="ctr"/>
-            <a:r>
-              <a:rPr lang="ja-JP" altLang="en-US" sz="2000" b="1" dirty="0"/>
-              <a:t>説明</a:t>
-            </a:r>
-            <a:endParaRPr kumimoji="1" lang="ja-JP" altLang="en-US" sz="2000" b="1" dirty="0"/>
-          </a:p>
-        </p:txBody>
-      </p:sp>
-      <p:sp>
-        <p:nvSpPr>
-          <p:cNvPr id="9" name="角丸四角形 8"/>
-          <p:cNvSpPr/>
-          <p:nvPr/>
-        </p:nvSpPr>
-        <p:spPr>
-          <a:xfrm>
-            <a:off x="2357306" y="1904301"/>
-            <a:ext cx="503339" cy="503339"/>
-          </a:xfrm>
-          <a:prstGeom prst="roundRect">
-            <a:avLst>
-              <a:gd name="adj" fmla="val 10000"/>
-            </a:avLst>
-          </a:prstGeom>
-          <a:noFill/>
-          <a:ln w="19050">
-            <a:solidFill>
-              <a:schemeClr val="tx1"/>
-            </a:solidFill>
-          </a:ln>
-        </p:spPr>
-        <p:style>
-          <a:lnRef idx="2">
-            <a:schemeClr val="accent1">
-              <a:shade val="50000"/>
-            </a:schemeClr>
-          </a:lnRef>
-          <a:fillRef idx="1">
-            <a:schemeClr val="accent1"/>
-          </a:fillRef>
-          <a:effectRef idx="0">
-            <a:schemeClr val="accent1"/>
-          </a:effectRef>
-          <a:fontRef idx="minor">
-            <a:schemeClr val="lt1"/>
-          </a:fontRef>
-        </p:style>
-        <p:txBody>
-          <a:bodyPr rtlCol="0" anchor="ctr"/>
-          <a:lstStyle/>
-          <a:p>
-            <a:pPr algn="ctr"/>
-            <a:r>
-              <a:rPr lang="en-US" altLang="ja-JP" sz="2400" b="1" dirty="0">
-                <a:solidFill>
-                  <a:schemeClr val="tx1"/>
-                </a:solidFill>
-              </a:rPr>
-              <a:t>W</a:t>
-            </a:r>
-            <a:endParaRPr kumimoji="1" lang="ja-JP" altLang="en-US" sz="2400" b="1" dirty="0">
-              <a:solidFill>
-                <a:schemeClr val="tx1"/>
-              </a:solidFill>
-            </a:endParaRPr>
-          </a:p>
-        </p:txBody>
-      </p:sp>
-      <p:sp>
-        <p:nvSpPr>
-          <p:cNvPr id="10" name="角丸四角形 9"/>
-          <p:cNvSpPr/>
-          <p:nvPr/>
-        </p:nvSpPr>
-        <p:spPr>
-          <a:xfrm>
-            <a:off x="2357306" y="2509707"/>
-            <a:ext cx="503339" cy="503339"/>
-          </a:xfrm>
-          <a:prstGeom prst="roundRect">
-            <a:avLst>
-              <a:gd name="adj" fmla="val 10000"/>
-            </a:avLst>
-          </a:prstGeom>
-          <a:noFill/>
-          <a:ln w="19050">
-            <a:solidFill>
-              <a:schemeClr val="tx1"/>
-            </a:solidFill>
-          </a:ln>
-        </p:spPr>
-        <p:style>
-          <a:lnRef idx="2">
-            <a:schemeClr val="accent1">
-              <a:shade val="50000"/>
-            </a:schemeClr>
-          </a:lnRef>
-          <a:fillRef idx="1">
-            <a:schemeClr val="accent1"/>
-          </a:fillRef>
-          <a:effectRef idx="0">
-            <a:schemeClr val="accent1"/>
-          </a:effectRef>
-          <a:fontRef idx="minor">
-            <a:schemeClr val="lt1"/>
-          </a:fontRef>
-        </p:style>
-        <p:txBody>
-          <a:bodyPr rtlCol="0" anchor="ctr"/>
-          <a:lstStyle/>
-          <a:p>
-            <a:pPr algn="ctr"/>
-            <a:r>
-              <a:rPr lang="en-US" altLang="ja-JP" sz="2400" b="1" dirty="0" smtClean="0">
-                <a:solidFill>
-                  <a:schemeClr val="tx1"/>
-                </a:solidFill>
-              </a:rPr>
-              <a:t>S</a:t>
-            </a:r>
-            <a:endParaRPr kumimoji="1" lang="ja-JP" altLang="en-US" sz="2400" b="1" dirty="0">
-              <a:solidFill>
-                <a:schemeClr val="tx1"/>
-              </a:solidFill>
-            </a:endParaRPr>
-          </a:p>
-        </p:txBody>
-      </p:sp>
-      <p:sp>
-        <p:nvSpPr>
-          <p:cNvPr id="11" name="角丸四角形 10"/>
-          <p:cNvSpPr/>
-          <p:nvPr/>
-        </p:nvSpPr>
-        <p:spPr>
-          <a:xfrm>
-            <a:off x="2357306" y="3115113"/>
-            <a:ext cx="503339" cy="503339"/>
-          </a:xfrm>
-          <a:prstGeom prst="roundRect">
-            <a:avLst>
-              <a:gd name="adj" fmla="val 10000"/>
-            </a:avLst>
-          </a:prstGeom>
-          <a:noFill/>
-          <a:ln w="19050">
-            <a:solidFill>
-              <a:schemeClr val="tx1"/>
-            </a:solidFill>
-          </a:ln>
-        </p:spPr>
-        <p:style>
-          <a:lnRef idx="2">
-            <a:schemeClr val="accent1">
-              <a:shade val="50000"/>
-            </a:schemeClr>
-          </a:lnRef>
-          <a:fillRef idx="1">
-            <a:schemeClr val="accent1"/>
-          </a:fillRef>
-          <a:effectRef idx="0">
-            <a:schemeClr val="accent1"/>
-          </a:effectRef>
-          <a:fontRef idx="minor">
-            <a:schemeClr val="lt1"/>
-          </a:fontRef>
-        </p:style>
-        <p:txBody>
-          <a:bodyPr rtlCol="0" anchor="ctr"/>
-          <a:lstStyle/>
-          <a:p>
-            <a:pPr algn="ctr"/>
-            <a:r>
-              <a:rPr lang="en-US" altLang="ja-JP" sz="2400" b="1" dirty="0" smtClean="0">
-                <a:solidFill>
-                  <a:schemeClr val="tx1"/>
-                </a:solidFill>
-              </a:rPr>
-              <a:t>D</a:t>
-            </a:r>
-            <a:endParaRPr kumimoji="1" lang="ja-JP" altLang="en-US" sz="2400" b="1" dirty="0">
-              <a:solidFill>
-                <a:schemeClr val="tx1"/>
-              </a:solidFill>
-            </a:endParaRPr>
-          </a:p>
-        </p:txBody>
-      </p:sp>
-      <p:sp>
-        <p:nvSpPr>
-          <p:cNvPr id="12" name="角丸四角形 11"/>
-          <p:cNvSpPr/>
-          <p:nvPr/>
-        </p:nvSpPr>
-        <p:spPr>
-          <a:xfrm>
-            <a:off x="2357305" y="3720519"/>
-            <a:ext cx="503339" cy="503339"/>
-          </a:xfrm>
-          <a:prstGeom prst="roundRect">
-            <a:avLst>
-              <a:gd name="adj" fmla="val 10000"/>
-            </a:avLst>
-          </a:prstGeom>
-          <a:noFill/>
-          <a:ln w="19050">
-            <a:solidFill>
-              <a:schemeClr val="tx1"/>
-            </a:solidFill>
-          </a:ln>
-        </p:spPr>
-        <p:style>
-          <a:lnRef idx="2">
-            <a:schemeClr val="accent1">
-              <a:shade val="50000"/>
-            </a:schemeClr>
-          </a:lnRef>
-          <a:fillRef idx="1">
-            <a:schemeClr val="accent1"/>
-          </a:fillRef>
-          <a:effectRef idx="0">
-            <a:schemeClr val="accent1"/>
-          </a:effectRef>
-          <a:fontRef idx="minor">
-            <a:schemeClr val="lt1"/>
-          </a:fontRef>
-        </p:style>
-        <p:txBody>
-          <a:bodyPr rtlCol="0" anchor="ctr"/>
-          <a:lstStyle/>
-          <a:p>
-            <a:pPr algn="ctr"/>
-            <a:r>
-              <a:rPr lang="en-US" altLang="ja-JP" sz="2400" b="1" dirty="0" smtClean="0">
-                <a:solidFill>
-                  <a:schemeClr val="tx1"/>
-                </a:solidFill>
-              </a:rPr>
-              <a:t>A</a:t>
-            </a:r>
-            <a:endParaRPr kumimoji="1" lang="ja-JP" altLang="en-US" sz="2400" b="1" dirty="0">
-              <a:solidFill>
-                <a:schemeClr val="tx1"/>
-              </a:solidFill>
-            </a:endParaRPr>
-          </a:p>
-        </p:txBody>
-      </p:sp>
-      <p:sp>
-        <p:nvSpPr>
-          <p:cNvPr id="13" name="角丸四角形 12"/>
-          <p:cNvSpPr/>
-          <p:nvPr/>
-        </p:nvSpPr>
-        <p:spPr>
-          <a:xfrm>
-            <a:off x="2165757" y="4340604"/>
-            <a:ext cx="871058" cy="503339"/>
-          </a:xfrm>
-          <a:prstGeom prst="roundRect">
-            <a:avLst>
-              <a:gd name="adj" fmla="val 10000"/>
-            </a:avLst>
-          </a:prstGeom>
-          <a:noFill/>
-          <a:ln w="19050">
-            <a:solidFill>
-              <a:schemeClr val="tx1"/>
-            </a:solidFill>
-          </a:ln>
-        </p:spPr>
-        <p:style>
-          <a:lnRef idx="2">
-            <a:schemeClr val="accent1">
-              <a:shade val="50000"/>
-            </a:schemeClr>
-          </a:lnRef>
-          <a:fillRef idx="1">
-            <a:schemeClr val="accent1"/>
-          </a:fillRef>
-          <a:effectRef idx="0">
-            <a:schemeClr val="accent1"/>
-          </a:effectRef>
-          <a:fontRef idx="minor">
-            <a:schemeClr val="lt1"/>
-          </a:fontRef>
-        </p:style>
-        <p:txBody>
-          <a:bodyPr rtlCol="0" anchor="ctr"/>
-          <a:lstStyle/>
-          <a:p>
-            <a:pPr algn="ctr"/>
-            <a:r>
-              <a:rPr kumimoji="1" lang="en-US" altLang="ja-JP" sz="2000" b="1" dirty="0" smtClean="0">
-                <a:solidFill>
-                  <a:schemeClr val="tx1"/>
-                </a:solidFill>
-              </a:rPr>
-              <a:t>Shift</a:t>
-            </a:r>
-            <a:endParaRPr kumimoji="1" lang="ja-JP" altLang="en-US" sz="2000" b="1" dirty="0">
-              <a:solidFill>
-                <a:schemeClr val="tx1"/>
-              </a:solidFill>
-            </a:endParaRPr>
-          </a:p>
-        </p:txBody>
-      </p:sp>
-      <p:sp>
-        <p:nvSpPr>
-          <p:cNvPr id="14" name="角丸四角形 13"/>
-          <p:cNvSpPr/>
-          <p:nvPr/>
-        </p:nvSpPr>
-        <p:spPr>
-          <a:xfrm>
-            <a:off x="2357305" y="4960689"/>
-            <a:ext cx="503339" cy="503339"/>
-          </a:xfrm>
-          <a:prstGeom prst="roundRect">
-            <a:avLst>
-              <a:gd name="adj" fmla="val 10000"/>
-            </a:avLst>
-          </a:prstGeom>
-          <a:noFill/>
-          <a:ln w="19050">
-            <a:solidFill>
-              <a:schemeClr val="tx1"/>
-            </a:solidFill>
-          </a:ln>
-        </p:spPr>
-        <p:style>
-          <a:lnRef idx="2">
-            <a:schemeClr val="accent1">
-              <a:shade val="50000"/>
-            </a:schemeClr>
-          </a:lnRef>
-          <a:fillRef idx="1">
-            <a:schemeClr val="accent1"/>
-          </a:fillRef>
-          <a:effectRef idx="0">
-            <a:schemeClr val="accent1"/>
-          </a:effectRef>
-          <a:fontRef idx="minor">
-            <a:schemeClr val="lt1"/>
-          </a:fontRef>
-        </p:style>
-        <p:txBody>
-          <a:bodyPr rtlCol="0" anchor="ctr"/>
-          <a:lstStyle/>
-          <a:p>
-            <a:pPr algn="ctr"/>
-            <a:r>
-              <a:rPr lang="en-US" altLang="ja-JP" sz="2400" b="1" dirty="0" smtClean="0">
-                <a:solidFill>
-                  <a:schemeClr val="tx1"/>
-                </a:solidFill>
-              </a:rPr>
-              <a:t>R</a:t>
-            </a:r>
-            <a:endParaRPr kumimoji="1" lang="ja-JP" altLang="en-US" sz="2400" b="1" dirty="0">
-              <a:solidFill>
-                <a:schemeClr val="tx1"/>
-              </a:solidFill>
-            </a:endParaRPr>
-          </a:p>
-        </p:txBody>
-      </p:sp>
-      <p:sp>
-        <p:nvSpPr>
-          <p:cNvPr id="51" name="テキスト ボックス 50"/>
-          <p:cNvSpPr txBox="1"/>
-          <p:nvPr/>
-        </p:nvSpPr>
-        <p:spPr>
-          <a:xfrm>
-            <a:off x="2994870" y="1972693"/>
-            <a:ext cx="956345" cy="400110"/>
-          </a:xfrm>
-          <a:prstGeom prst="rect">
-            <a:avLst/>
-          </a:prstGeom>
-          <a:noFill/>
-        </p:spPr>
-        <p:txBody>
-          <a:bodyPr wrap="square" rtlCol="0">
-            <a:spAutoFit/>
-          </a:bodyPr>
-          <a:lstStyle/>
-          <a:p>
-            <a:r>
-              <a:rPr kumimoji="1" lang="ja-JP" altLang="en-US" sz="2000" b="1" dirty="0" smtClean="0"/>
-              <a:t>：前進</a:t>
-            </a:r>
-            <a:endParaRPr kumimoji="1" lang="ja-JP" altLang="en-US" sz="2000" b="1" dirty="0"/>
-          </a:p>
-        </p:txBody>
-      </p:sp>
-      <p:sp>
-        <p:nvSpPr>
-          <p:cNvPr id="52" name="テキスト ボックス 51"/>
-          <p:cNvSpPr txBox="1"/>
-          <p:nvPr/>
-        </p:nvSpPr>
-        <p:spPr>
-          <a:xfrm>
-            <a:off x="2994870" y="2586488"/>
-            <a:ext cx="956345" cy="400110"/>
-          </a:xfrm>
-          <a:prstGeom prst="rect">
-            <a:avLst/>
-          </a:prstGeom>
-          <a:noFill/>
-        </p:spPr>
-        <p:txBody>
-          <a:bodyPr wrap="square" rtlCol="0">
-            <a:spAutoFit/>
-          </a:bodyPr>
-          <a:lstStyle/>
-          <a:p>
-            <a:r>
-              <a:rPr kumimoji="1" lang="ja-JP" altLang="en-US" sz="2000" b="1" dirty="0" smtClean="0"/>
-              <a:t>：後退</a:t>
-            </a:r>
-            <a:endParaRPr kumimoji="1" lang="ja-JP" altLang="en-US" sz="2000" b="1" dirty="0"/>
-          </a:p>
-        </p:txBody>
-      </p:sp>
-      <p:sp>
-        <p:nvSpPr>
-          <p:cNvPr id="53" name="テキスト ボックス 52"/>
-          <p:cNvSpPr txBox="1"/>
-          <p:nvPr/>
-        </p:nvSpPr>
-        <p:spPr>
-          <a:xfrm>
-            <a:off x="3003259" y="3200283"/>
-            <a:ext cx="1208014" cy="400110"/>
-          </a:xfrm>
-          <a:prstGeom prst="rect">
-            <a:avLst/>
-          </a:prstGeom>
-          <a:noFill/>
-        </p:spPr>
-        <p:txBody>
-          <a:bodyPr wrap="square" rtlCol="0">
-            <a:spAutoFit/>
-          </a:bodyPr>
-          <a:lstStyle/>
-          <a:p>
-            <a:r>
-              <a:rPr kumimoji="1" lang="ja-JP" altLang="en-US" sz="2000" b="1" dirty="0" smtClean="0"/>
-              <a:t>：右回転</a:t>
-            </a:r>
-            <a:endParaRPr kumimoji="1" lang="ja-JP" altLang="en-US" sz="2000" b="1" dirty="0"/>
-          </a:p>
-        </p:txBody>
-      </p:sp>
-      <p:sp>
-        <p:nvSpPr>
-          <p:cNvPr id="54" name="テキスト ボックス 53"/>
-          <p:cNvSpPr txBox="1"/>
-          <p:nvPr/>
-        </p:nvSpPr>
-        <p:spPr>
-          <a:xfrm>
-            <a:off x="3003259" y="3815359"/>
-            <a:ext cx="1208014" cy="400110"/>
-          </a:xfrm>
-          <a:prstGeom prst="rect">
-            <a:avLst/>
-          </a:prstGeom>
-          <a:noFill/>
-        </p:spPr>
-        <p:txBody>
-          <a:bodyPr wrap="square" rtlCol="0">
-            <a:spAutoFit/>
-          </a:bodyPr>
-          <a:lstStyle/>
-          <a:p>
-            <a:r>
-              <a:rPr kumimoji="1" lang="ja-JP" altLang="en-US" sz="2000" b="1" dirty="0" smtClean="0"/>
-              <a:t>：左回転</a:t>
-            </a:r>
-            <a:endParaRPr kumimoji="1" lang="ja-JP" altLang="en-US" sz="2000" b="1" dirty="0"/>
-          </a:p>
-        </p:txBody>
-      </p:sp>
-      <p:sp>
-        <p:nvSpPr>
-          <p:cNvPr id="55" name="テキスト ボックス 54"/>
-          <p:cNvSpPr txBox="1"/>
-          <p:nvPr/>
-        </p:nvSpPr>
-        <p:spPr>
-          <a:xfrm>
-            <a:off x="3003259" y="4420883"/>
-            <a:ext cx="1484851" cy="400110"/>
-          </a:xfrm>
-          <a:prstGeom prst="rect">
-            <a:avLst/>
-          </a:prstGeom>
-          <a:noFill/>
-        </p:spPr>
-        <p:txBody>
-          <a:bodyPr wrap="square" rtlCol="0">
-            <a:spAutoFit/>
-          </a:bodyPr>
-          <a:lstStyle/>
-          <a:p>
-            <a:r>
-              <a:rPr kumimoji="1" lang="ja-JP" altLang="en-US" sz="2000" b="1" dirty="0" smtClean="0"/>
-              <a:t>：ダッシュ</a:t>
-            </a:r>
-            <a:endParaRPr kumimoji="1" lang="ja-JP" altLang="en-US" sz="2000" b="1" dirty="0"/>
-          </a:p>
-        </p:txBody>
-      </p:sp>
-      <p:sp>
-        <p:nvSpPr>
-          <p:cNvPr id="56" name="テキスト ボックス 55"/>
-          <p:cNvSpPr txBox="1"/>
-          <p:nvPr/>
-        </p:nvSpPr>
-        <p:spPr>
-          <a:xfrm>
-            <a:off x="2994870" y="5049357"/>
-            <a:ext cx="1728132" cy="400110"/>
-          </a:xfrm>
-          <a:prstGeom prst="rect">
-            <a:avLst/>
-          </a:prstGeom>
-          <a:noFill/>
-        </p:spPr>
-        <p:txBody>
-          <a:bodyPr wrap="square" rtlCol="0">
-            <a:spAutoFit/>
-          </a:bodyPr>
-          <a:lstStyle/>
-          <a:p>
-            <a:r>
-              <a:rPr kumimoji="1" lang="ja-JP" altLang="en-US" sz="2000" b="1" dirty="0" smtClean="0"/>
-              <a:t>：リスタート</a:t>
-            </a:r>
-            <a:endParaRPr kumimoji="1" lang="ja-JP" altLang="en-US" sz="2000" b="1" dirty="0"/>
-          </a:p>
-        </p:txBody>
-      </p:sp>
-      <p:cxnSp>
-        <p:nvCxnSpPr>
-          <p:cNvPr id="57" name="直線コネクタ 56"/>
-          <p:cNvCxnSpPr/>
-          <p:nvPr/>
-        </p:nvCxnSpPr>
-        <p:spPr>
-          <a:xfrm>
-            <a:off x="3095625" y="2452688"/>
-            <a:ext cx="2152650" cy="394"/>
-          </a:xfrm>
-          <a:prstGeom prst="line">
-            <a:avLst/>
-          </a:prstGeom>
-          <a:ln w="12700">
-            <a:solidFill>
-              <a:srgbClr val="66AA59"/>
-            </a:solidFill>
-            <a:prstDash val="sysDash"/>
-          </a:ln>
-        </p:spPr>
-        <p:style>
-          <a:lnRef idx="1">
-            <a:schemeClr val="accent1"/>
-          </a:lnRef>
-          <a:fillRef idx="0">
-            <a:schemeClr val="accent1"/>
-          </a:fillRef>
-          <a:effectRef idx="0">
-            <a:schemeClr val="accent1"/>
-          </a:effectRef>
-          <a:fontRef idx="minor">
-            <a:schemeClr val="tx1"/>
-          </a:fontRef>
-        </p:style>
-      </p:cxnSp>
-      <p:cxnSp>
-        <p:nvCxnSpPr>
-          <p:cNvPr id="58" name="直線コネクタ 57"/>
-          <p:cNvCxnSpPr/>
-          <p:nvPr/>
-        </p:nvCxnSpPr>
-        <p:spPr>
-          <a:xfrm>
-            <a:off x="3095625" y="3063882"/>
-            <a:ext cx="2152650" cy="394"/>
-          </a:xfrm>
-          <a:prstGeom prst="line">
-            <a:avLst/>
-          </a:prstGeom>
-          <a:ln w="12700">
-            <a:solidFill>
-              <a:srgbClr val="66AA59"/>
-            </a:solidFill>
-            <a:prstDash val="sysDash"/>
-          </a:ln>
-        </p:spPr>
-        <p:style>
-          <a:lnRef idx="1">
-            <a:schemeClr val="accent1"/>
-          </a:lnRef>
-          <a:fillRef idx="0">
-            <a:schemeClr val="accent1"/>
-          </a:fillRef>
-          <a:effectRef idx="0">
-            <a:schemeClr val="accent1"/>
-          </a:effectRef>
-          <a:fontRef idx="minor">
-            <a:schemeClr val="tx1"/>
-          </a:fontRef>
-        </p:style>
-      </p:cxnSp>
-      <p:cxnSp>
-        <p:nvCxnSpPr>
-          <p:cNvPr id="59" name="直線コネクタ 58"/>
-          <p:cNvCxnSpPr/>
-          <p:nvPr/>
-        </p:nvCxnSpPr>
-        <p:spPr>
-          <a:xfrm>
-            <a:off x="3095625" y="3675076"/>
-            <a:ext cx="2152650" cy="394"/>
-          </a:xfrm>
-          <a:prstGeom prst="line">
-            <a:avLst/>
-          </a:prstGeom>
-          <a:ln w="12700">
-            <a:solidFill>
-              <a:srgbClr val="66AA59"/>
-            </a:solidFill>
-            <a:prstDash val="sysDash"/>
-          </a:ln>
-        </p:spPr>
-        <p:style>
-          <a:lnRef idx="1">
-            <a:schemeClr val="accent1"/>
-          </a:lnRef>
-          <a:fillRef idx="0">
-            <a:schemeClr val="accent1"/>
-          </a:fillRef>
-          <a:effectRef idx="0">
-            <a:schemeClr val="accent1"/>
-          </a:effectRef>
-          <a:fontRef idx="minor">
-            <a:schemeClr val="tx1"/>
-          </a:fontRef>
-        </p:style>
-      </p:cxnSp>
-      <p:cxnSp>
-        <p:nvCxnSpPr>
-          <p:cNvPr id="60" name="直線コネクタ 59"/>
-          <p:cNvCxnSpPr/>
-          <p:nvPr/>
-        </p:nvCxnSpPr>
-        <p:spPr>
-          <a:xfrm>
-            <a:off x="3095625" y="4281523"/>
-            <a:ext cx="2152650" cy="394"/>
-          </a:xfrm>
-          <a:prstGeom prst="line">
-            <a:avLst/>
-          </a:prstGeom>
-          <a:ln w="12700">
-            <a:solidFill>
-              <a:srgbClr val="66AA59"/>
-            </a:solidFill>
-            <a:prstDash val="sysDash"/>
-          </a:ln>
-        </p:spPr>
-        <p:style>
-          <a:lnRef idx="1">
-            <a:schemeClr val="accent1"/>
-          </a:lnRef>
-          <a:fillRef idx="0">
-            <a:schemeClr val="accent1"/>
-          </a:fillRef>
-          <a:effectRef idx="0">
-            <a:schemeClr val="accent1"/>
-          </a:effectRef>
-          <a:fontRef idx="minor">
-            <a:schemeClr val="tx1"/>
-          </a:fontRef>
-        </p:style>
-      </p:cxnSp>
-      <p:cxnSp>
-        <p:nvCxnSpPr>
-          <p:cNvPr id="61" name="直線コネクタ 60"/>
-          <p:cNvCxnSpPr/>
-          <p:nvPr/>
-        </p:nvCxnSpPr>
-        <p:spPr>
-          <a:xfrm>
-            <a:off x="3095625" y="4887970"/>
-            <a:ext cx="2152650" cy="394"/>
-          </a:xfrm>
-          <a:prstGeom prst="line">
-            <a:avLst/>
-          </a:prstGeom>
-          <a:ln w="12700">
-            <a:solidFill>
-              <a:srgbClr val="66AA59"/>
-            </a:solidFill>
-            <a:prstDash val="sysDash"/>
-          </a:ln>
-        </p:spPr>
-        <p:style>
-          <a:lnRef idx="1">
-            <a:schemeClr val="accent1"/>
-          </a:lnRef>
-          <a:fillRef idx="0">
-            <a:schemeClr val="accent1"/>
-          </a:fillRef>
-          <a:effectRef idx="0">
-            <a:schemeClr val="accent1"/>
-          </a:effectRef>
-          <a:fontRef idx="minor">
-            <a:schemeClr val="tx1"/>
-          </a:fontRef>
-        </p:style>
-      </p:cxnSp>
-      <p:cxnSp>
-        <p:nvCxnSpPr>
-          <p:cNvPr id="62" name="直線コネクタ 61"/>
-          <p:cNvCxnSpPr/>
-          <p:nvPr/>
-        </p:nvCxnSpPr>
-        <p:spPr>
-          <a:xfrm>
-            <a:off x="3095625" y="5494417"/>
-            <a:ext cx="2152650" cy="394"/>
-          </a:xfrm>
-          <a:prstGeom prst="line">
-            <a:avLst/>
-          </a:prstGeom>
-          <a:ln w="12700">
-            <a:solidFill>
-              <a:srgbClr val="66AA59"/>
-            </a:solidFill>
-            <a:prstDash val="sysDash"/>
-          </a:ln>
-        </p:spPr>
-        <p:style>
-          <a:lnRef idx="1">
-            <a:schemeClr val="accent1"/>
-          </a:lnRef>
-          <a:fillRef idx="0">
-            <a:schemeClr val="accent1"/>
-          </a:fillRef>
-          <a:effectRef idx="0">
-            <a:schemeClr val="accent1"/>
-          </a:effectRef>
-          <a:fontRef idx="minor">
-            <a:schemeClr val="tx1"/>
-          </a:fontRef>
-        </p:style>
-      </p:cxnSp>
-      <p:cxnSp>
-        <p:nvCxnSpPr>
-          <p:cNvPr id="63" name="直線コネクタ 62"/>
-          <p:cNvCxnSpPr/>
-          <p:nvPr/>
-        </p:nvCxnSpPr>
-        <p:spPr>
-          <a:xfrm>
-            <a:off x="6000681" y="3120822"/>
-            <a:ext cx="4162494" cy="0"/>
-          </a:xfrm>
-          <a:prstGeom prst="line">
-            <a:avLst/>
-          </a:prstGeom>
-          <a:ln w="12700">
-            <a:solidFill>
-              <a:srgbClr val="66AA59"/>
-            </a:solidFill>
-            <a:prstDash val="sysDash"/>
-          </a:ln>
-        </p:spPr>
-        <p:style>
-          <a:lnRef idx="1">
-            <a:schemeClr val="accent1"/>
-          </a:lnRef>
-          <a:fillRef idx="0">
-            <a:schemeClr val="accent1"/>
-          </a:fillRef>
-          <a:effectRef idx="0">
-            <a:schemeClr val="accent1"/>
-          </a:effectRef>
-          <a:fontRef idx="minor">
-            <a:schemeClr val="tx1"/>
-          </a:fontRef>
-        </p:style>
-      </p:cxnSp>
-      <p:cxnSp>
-        <p:nvCxnSpPr>
-          <p:cNvPr id="65" name="直線コネクタ 64"/>
-          <p:cNvCxnSpPr/>
-          <p:nvPr/>
-        </p:nvCxnSpPr>
-        <p:spPr>
-          <a:xfrm flipH="1">
-            <a:off x="5705475" y="1347801"/>
-            <a:ext cx="1201" cy="4248137"/>
-          </a:xfrm>
-          <a:prstGeom prst="line">
-            <a:avLst/>
-          </a:prstGeom>
-          <a:ln w="12700">
-            <a:solidFill>
-              <a:srgbClr val="66AA59"/>
-            </a:solidFill>
-            <a:prstDash val="sysDash"/>
-          </a:ln>
-        </p:spPr>
-        <p:style>
-          <a:lnRef idx="1">
-            <a:schemeClr val="accent1"/>
-          </a:lnRef>
-          <a:fillRef idx="0">
-            <a:schemeClr val="accent1"/>
-          </a:fillRef>
-          <a:effectRef idx="0">
-            <a:schemeClr val="accent1"/>
-          </a:effectRef>
-          <a:fontRef idx="minor">
-            <a:schemeClr val="tx1"/>
-          </a:fontRef>
-        </p:style>
-      </p:cxnSp>
-      <p:sp>
-        <p:nvSpPr>
-          <p:cNvPr id="66" name="テキスト ボックス 65"/>
-          <p:cNvSpPr txBox="1"/>
-          <p:nvPr/>
-        </p:nvSpPr>
-        <p:spPr>
-          <a:xfrm>
-            <a:off x="5918609" y="1866175"/>
-            <a:ext cx="4577418" cy="1754326"/>
-          </a:xfrm>
-          <a:prstGeom prst="rect">
-            <a:avLst/>
-          </a:prstGeom>
-          <a:noFill/>
-        </p:spPr>
-        <p:txBody>
-          <a:bodyPr wrap="square" rtlCol="0">
-            <a:spAutoFit/>
-          </a:bodyPr>
-          <a:lstStyle/>
-          <a:p>
-            <a:r>
-              <a:rPr kumimoji="1" lang="ja-JP" altLang="en-US" b="1" dirty="0" smtClean="0"/>
-              <a:t>・ダッシュはスタミナを消費する</a:t>
-            </a:r>
-            <a:endParaRPr kumimoji="1" lang="en-US" altLang="ja-JP" b="1" dirty="0" smtClean="0"/>
-          </a:p>
-          <a:p>
-            <a:r>
-              <a:rPr lang="ja-JP" altLang="en-US" b="1" dirty="0" smtClean="0"/>
-              <a:t>・</a:t>
-            </a:r>
-            <a:r>
-              <a:rPr lang="ja-JP" altLang="en-US" b="1" dirty="0"/>
-              <a:t>スタミナは時間経過で少しずつ回復</a:t>
-            </a:r>
-            <a:r>
-              <a:rPr lang="ja-JP" altLang="en-US" b="1" dirty="0" smtClean="0"/>
-              <a:t>する</a:t>
-            </a:r>
-            <a:endParaRPr lang="en-US" altLang="ja-JP" b="1" dirty="0" smtClean="0"/>
-          </a:p>
-          <a:p>
-            <a:r>
-              <a:rPr lang="ja-JP" altLang="en-US" b="1" dirty="0" smtClean="0"/>
-              <a:t>・</a:t>
-            </a:r>
-            <a:r>
-              <a:rPr lang="ja-JP" altLang="en-US" b="1" dirty="0"/>
-              <a:t>スタミナが０になると</a:t>
-            </a:r>
-            <a:endParaRPr lang="en-US" altLang="ja-JP" b="1" dirty="0"/>
-          </a:p>
-          <a:p>
-            <a:r>
-              <a:rPr lang="ja-JP" altLang="en-US" b="1" dirty="0" smtClean="0"/>
-              <a:t>　全回復</a:t>
-            </a:r>
-            <a:r>
-              <a:rPr lang="ja-JP" altLang="en-US" b="1" dirty="0"/>
-              <a:t>するまで移動操作ができなくなる</a:t>
-            </a:r>
-            <a:endParaRPr lang="en-US" altLang="ja-JP" b="1" dirty="0"/>
-          </a:p>
-          <a:p>
-            <a:endParaRPr lang="en-US" altLang="ja-JP" b="1" dirty="0"/>
-          </a:p>
-          <a:p>
-            <a:endParaRPr kumimoji="1" lang="en-US" altLang="ja-JP" b="1" dirty="0" smtClean="0"/>
-          </a:p>
-        </p:txBody>
-      </p:sp>
       <p:grpSp>
         <p:nvGrpSpPr>
           <p:cNvPr id="77" name="グループ化 76"/>
@@ -4599,190 +3544,1260 @@
           </p:txBody>
         </p:sp>
       </p:grpSp>
-      <p:sp>
-        <p:nvSpPr>
-          <p:cNvPr id="35" name="テキスト ボックス 34"/>
-          <p:cNvSpPr txBox="1"/>
+      <p:grpSp>
+        <p:nvGrpSpPr>
+          <p:cNvPr id="2" name="グループ化 1"/>
+          <p:cNvGrpSpPr/>
           <p:nvPr/>
-        </p:nvSpPr>
-        <p:spPr>
+        </p:nvGrpSpPr>
+        <p:grpSpPr>
           <a:xfrm>
-            <a:off x="5859885" y="3778826"/>
-            <a:ext cx="4627751" cy="2308324"/>
+            <a:off x="1704363" y="1140903"/>
+            <a:ext cx="8791664" cy="4946247"/>
+            <a:chOff x="1704363" y="1140903"/>
+            <a:chExt cx="8791664" cy="4946247"/>
           </a:xfrm>
-          <a:prstGeom prst="rect">
-            <a:avLst/>
-          </a:prstGeom>
-          <a:noFill/>
-        </p:spPr>
-        <p:txBody>
-          <a:bodyPr wrap="square" rtlCol="0">
-            <a:spAutoFit/>
-          </a:bodyPr>
-          <a:lstStyle>
-            <a:defPPr>
-              <a:defRPr lang="ja-JP"/>
-            </a:defPPr>
-            <a:lvl1pPr>
-              <a:defRPr b="1"/>
-            </a:lvl1pPr>
-          </a:lstStyle>
-          <a:p>
-            <a:r>
-              <a:rPr lang="ja-JP" altLang="en-US" sz="1600" dirty="0"/>
-              <a:t>自転車を操作し、プレイヤーを落とさず</a:t>
-            </a:r>
-            <a:r>
-              <a:rPr lang="ja-JP" altLang="en-US" sz="1600" dirty="0" smtClean="0"/>
-              <a:t>に</a:t>
-            </a:r>
-            <a:endParaRPr lang="en-US" altLang="ja-JP" sz="1600" dirty="0" smtClean="0"/>
-          </a:p>
-          <a:p>
-            <a:r>
-              <a:rPr lang="ja-JP" altLang="en-US" sz="1600" dirty="0" smtClean="0"/>
-              <a:t>ギミック</a:t>
-            </a:r>
-            <a:r>
-              <a:rPr lang="ja-JP" altLang="en-US" sz="1600" dirty="0"/>
-              <a:t>を突破</a:t>
-            </a:r>
-            <a:r>
-              <a:rPr lang="ja-JP" altLang="en-US" sz="1600" dirty="0" smtClean="0"/>
-              <a:t>して</a:t>
-            </a:r>
-            <a:endParaRPr lang="en-US" altLang="ja-JP" sz="1600" dirty="0" smtClean="0"/>
-          </a:p>
-          <a:p>
-            <a:r>
-              <a:rPr lang="ja-JP" altLang="en-US" sz="1600" dirty="0" smtClean="0"/>
-              <a:t>ゴール</a:t>
-            </a:r>
-            <a:r>
-              <a:rPr lang="ja-JP" altLang="en-US" sz="1600" dirty="0"/>
-              <a:t>を</a:t>
-            </a:r>
-            <a:r>
-              <a:rPr lang="ja-JP" altLang="en-US" sz="1600" dirty="0" smtClean="0"/>
-              <a:t>目指すアクションゲーム。</a:t>
-            </a:r>
-            <a:endParaRPr lang="en-US" altLang="ja-JP" sz="1600" dirty="0" smtClean="0"/>
-          </a:p>
-          <a:p>
-            <a:r>
-              <a:rPr lang="ja-JP" altLang="en-US" sz="1600" dirty="0" smtClean="0"/>
-              <a:t>プレイヤー</a:t>
-            </a:r>
-            <a:r>
-              <a:rPr lang="ja-JP" altLang="en-US" sz="1600" dirty="0"/>
-              <a:t>がゴールラインを越える</a:t>
-            </a:r>
-            <a:r>
-              <a:rPr lang="ja-JP" altLang="en-US" sz="1600" dirty="0" smtClean="0"/>
-              <a:t>と</a:t>
-            </a:r>
-            <a:endParaRPr lang="en-US" altLang="ja-JP" sz="1600" dirty="0" smtClean="0"/>
-          </a:p>
-          <a:p>
-            <a:r>
-              <a:rPr lang="ja-JP" altLang="en-US" sz="1600" dirty="0" smtClean="0"/>
-              <a:t>クリア</a:t>
-            </a:r>
-            <a:r>
-              <a:rPr lang="ja-JP" altLang="en-US" sz="1600" dirty="0"/>
-              <a:t>となり、赤い床や天井に触れる</a:t>
-            </a:r>
-            <a:r>
-              <a:rPr lang="ja-JP" altLang="en-US" sz="1600" dirty="0" smtClean="0"/>
-              <a:t>、</a:t>
-            </a:r>
-            <a:endParaRPr lang="en-US" altLang="ja-JP" sz="1600" dirty="0" smtClean="0"/>
-          </a:p>
-          <a:p>
-            <a:r>
-              <a:rPr lang="ja-JP" altLang="en-US" sz="1600" dirty="0" smtClean="0"/>
-              <a:t>プレイヤー</a:t>
-            </a:r>
-            <a:r>
-              <a:rPr lang="ja-JP" altLang="en-US" sz="1600" dirty="0"/>
-              <a:t>が落下する</a:t>
-            </a:r>
-            <a:r>
-              <a:rPr lang="ja-JP" altLang="en-US" sz="1600" dirty="0" smtClean="0"/>
-              <a:t>、</a:t>
-            </a:r>
-            <a:endParaRPr lang="en-US" altLang="ja-JP" sz="1600" dirty="0"/>
-          </a:p>
-          <a:p>
-            <a:r>
-              <a:rPr lang="ja-JP" altLang="en-US" sz="1600" dirty="0" smtClean="0"/>
-              <a:t>また</a:t>
-            </a:r>
-            <a:r>
-              <a:rPr lang="ja-JP" altLang="en-US" sz="1600" dirty="0"/>
-              <a:t>は時間切れになるとゲームオーバーとなる。</a:t>
-            </a:r>
-          </a:p>
-          <a:p>
-            <a:endParaRPr lang="en-US" altLang="ja-JP" sz="1600" dirty="0"/>
-          </a:p>
-          <a:p>
-            <a:endParaRPr lang="en-US" altLang="ja-JP" sz="1600" dirty="0"/>
-          </a:p>
-        </p:txBody>
-      </p:sp>
-      <p:sp>
-        <p:nvSpPr>
-          <p:cNvPr id="36" name="角丸四角形 35"/>
-          <p:cNvSpPr/>
-          <p:nvPr/>
-        </p:nvSpPr>
-        <p:spPr>
-          <a:xfrm>
-            <a:off x="7214533" y="3257725"/>
-            <a:ext cx="1644241" cy="360727"/>
-          </a:xfrm>
-          <a:prstGeom prst="roundRect">
-            <a:avLst>
-              <a:gd name="adj" fmla="val 50000"/>
-            </a:avLst>
-          </a:prstGeom>
-          <a:solidFill>
-            <a:srgbClr val="025228"/>
-          </a:solidFill>
-          <a:ln>
+        </p:grpSpPr>
+        <p:sp>
+          <p:nvSpPr>
+            <p:cNvPr id="6" name="角丸四角形 5"/>
+            <p:cNvSpPr/>
+            <p:nvPr/>
+          </p:nvSpPr>
+          <p:spPr>
+            <a:xfrm>
+              <a:off x="1704363" y="1140903"/>
+              <a:ext cx="8783274" cy="4706224"/>
+            </a:xfrm>
+            <a:prstGeom prst="roundRect">
+              <a:avLst>
+                <a:gd name="adj" fmla="val 5615"/>
+              </a:avLst>
+            </a:prstGeom>
+            <a:solidFill>
+              <a:schemeClr val="bg1"/>
+            </a:solidFill>
+            <a:ln w="38100">
+              <a:solidFill>
+                <a:srgbClr val="054C23"/>
+              </a:solidFill>
+            </a:ln>
+          </p:spPr>
+          <p:style>
+            <a:lnRef idx="2">
+              <a:schemeClr val="accent1">
+                <a:shade val="50000"/>
+              </a:schemeClr>
+            </a:lnRef>
+            <a:fillRef idx="1">
+              <a:schemeClr val="accent1"/>
+            </a:fillRef>
+            <a:effectRef idx="0">
+              <a:schemeClr val="accent1"/>
+            </a:effectRef>
+            <a:fontRef idx="minor">
+              <a:schemeClr val="lt1"/>
+            </a:fontRef>
+          </p:style>
+          <p:txBody>
+            <a:bodyPr rtlCol="0" anchor="ctr"/>
+            <a:lstStyle/>
+            <a:p>
+              <a:pPr algn="ctr"/>
+              <a:endParaRPr kumimoji="1" lang="ja-JP" altLang="en-US"/>
+            </a:p>
+          </p:txBody>
+        </p:sp>
+        <p:sp>
+          <p:nvSpPr>
+            <p:cNvPr id="7" name="角丸四角形 6"/>
+            <p:cNvSpPr/>
+            <p:nvPr/>
+          </p:nvSpPr>
+          <p:spPr>
+            <a:xfrm>
+              <a:off x="2768367" y="1342238"/>
+              <a:ext cx="1853967" cy="360727"/>
+            </a:xfrm>
+            <a:prstGeom prst="roundRect">
+              <a:avLst>
+                <a:gd name="adj" fmla="val 50000"/>
+              </a:avLst>
+            </a:prstGeom>
+            <a:solidFill>
+              <a:srgbClr val="025228"/>
+            </a:solidFill>
+            <a:ln>
+              <a:noFill/>
+            </a:ln>
+          </p:spPr>
+          <p:style>
+            <a:lnRef idx="2">
+              <a:schemeClr val="accent1">
+                <a:shade val="50000"/>
+              </a:schemeClr>
+            </a:lnRef>
+            <a:fillRef idx="1">
+              <a:schemeClr val="accent1"/>
+            </a:fillRef>
+            <a:effectRef idx="0">
+              <a:schemeClr val="accent1"/>
+            </a:effectRef>
+            <a:fontRef idx="minor">
+              <a:schemeClr val="lt1"/>
+            </a:fontRef>
+          </p:style>
+          <p:txBody>
+            <a:bodyPr rtlCol="0" anchor="ctr"/>
+            <a:lstStyle/>
+            <a:p>
+              <a:pPr algn="ctr"/>
+              <a:r>
+                <a:rPr kumimoji="1" lang="ja-JP" altLang="en-US" sz="2000" b="1" dirty="0" smtClean="0"/>
+                <a:t>操作方法</a:t>
+              </a:r>
+              <a:endParaRPr kumimoji="1" lang="ja-JP" altLang="en-US" sz="2000" b="1" dirty="0"/>
+            </a:p>
+          </p:txBody>
+        </p:sp>
+        <p:sp>
+          <p:nvSpPr>
+            <p:cNvPr id="8" name="角丸四角形 7"/>
+            <p:cNvSpPr/>
+            <p:nvPr/>
+          </p:nvSpPr>
+          <p:spPr>
+            <a:xfrm>
+              <a:off x="7214533" y="1342238"/>
+              <a:ext cx="1644241" cy="360727"/>
+            </a:xfrm>
+            <a:prstGeom prst="roundRect">
+              <a:avLst>
+                <a:gd name="adj" fmla="val 50000"/>
+              </a:avLst>
+            </a:prstGeom>
+            <a:solidFill>
+              <a:srgbClr val="025228"/>
+            </a:solidFill>
+            <a:ln>
+              <a:noFill/>
+            </a:ln>
+          </p:spPr>
+          <p:style>
+            <a:lnRef idx="2">
+              <a:schemeClr val="accent1">
+                <a:shade val="50000"/>
+              </a:schemeClr>
+            </a:lnRef>
+            <a:fillRef idx="1">
+              <a:schemeClr val="accent1"/>
+            </a:fillRef>
+            <a:effectRef idx="0">
+              <a:schemeClr val="accent1"/>
+            </a:effectRef>
+            <a:fontRef idx="minor">
+              <a:schemeClr val="lt1"/>
+            </a:fontRef>
+          </p:style>
+          <p:txBody>
+            <a:bodyPr rtlCol="0" anchor="ctr"/>
+            <a:lstStyle/>
+            <a:p>
+              <a:pPr algn="ctr"/>
+              <a:r>
+                <a:rPr lang="ja-JP" altLang="en-US" sz="2000" b="1" dirty="0"/>
+                <a:t>説明</a:t>
+              </a:r>
+              <a:endParaRPr kumimoji="1" lang="ja-JP" altLang="en-US" sz="2000" b="1" dirty="0"/>
+            </a:p>
+          </p:txBody>
+        </p:sp>
+        <p:sp>
+          <p:nvSpPr>
+            <p:cNvPr id="9" name="角丸四角形 8"/>
+            <p:cNvSpPr/>
+            <p:nvPr/>
+          </p:nvSpPr>
+          <p:spPr>
+            <a:xfrm>
+              <a:off x="2357306" y="1904301"/>
+              <a:ext cx="503339" cy="503339"/>
+            </a:xfrm>
+            <a:prstGeom prst="roundRect">
+              <a:avLst>
+                <a:gd name="adj" fmla="val 10000"/>
+              </a:avLst>
+            </a:prstGeom>
             <a:noFill/>
-          </a:ln>
-        </p:spPr>
-        <p:style>
-          <a:lnRef idx="2">
-            <a:schemeClr val="accent1">
-              <a:shade val="50000"/>
-            </a:schemeClr>
-          </a:lnRef>
-          <a:fillRef idx="1">
-            <a:schemeClr val="accent1"/>
-          </a:fillRef>
-          <a:effectRef idx="0">
-            <a:schemeClr val="accent1"/>
-          </a:effectRef>
-          <a:fontRef idx="minor">
-            <a:schemeClr val="lt1"/>
-          </a:fontRef>
-        </p:style>
-        <p:txBody>
-          <a:bodyPr rtlCol="0" anchor="ctr"/>
-          <a:lstStyle/>
-          <a:p>
-            <a:pPr algn="ctr"/>
-            <a:r>
-              <a:rPr lang="ja-JP" altLang="en-US" sz="2000" b="1" dirty="0" smtClean="0"/>
-              <a:t>ゲーム内容</a:t>
-            </a:r>
-            <a:endParaRPr kumimoji="1" lang="ja-JP" altLang="en-US" sz="2000" b="1" dirty="0"/>
-          </a:p>
-        </p:txBody>
-      </p:sp>
+            <a:ln w="19050">
+              <a:solidFill>
+                <a:schemeClr val="tx1"/>
+              </a:solidFill>
+            </a:ln>
+          </p:spPr>
+          <p:style>
+            <a:lnRef idx="2">
+              <a:schemeClr val="accent1">
+                <a:shade val="50000"/>
+              </a:schemeClr>
+            </a:lnRef>
+            <a:fillRef idx="1">
+              <a:schemeClr val="accent1"/>
+            </a:fillRef>
+            <a:effectRef idx="0">
+              <a:schemeClr val="accent1"/>
+            </a:effectRef>
+            <a:fontRef idx="minor">
+              <a:schemeClr val="lt1"/>
+            </a:fontRef>
+          </p:style>
+          <p:txBody>
+            <a:bodyPr rtlCol="0" anchor="ctr"/>
+            <a:lstStyle/>
+            <a:p>
+              <a:pPr algn="ctr"/>
+              <a:r>
+                <a:rPr lang="en-US" altLang="ja-JP" sz="2400" b="1" dirty="0">
+                  <a:solidFill>
+                    <a:schemeClr val="tx1"/>
+                  </a:solidFill>
+                </a:rPr>
+                <a:t>W</a:t>
+              </a:r>
+              <a:endParaRPr kumimoji="1" lang="ja-JP" altLang="en-US" sz="2400" b="1" dirty="0">
+                <a:solidFill>
+                  <a:schemeClr val="tx1"/>
+                </a:solidFill>
+              </a:endParaRPr>
+            </a:p>
+          </p:txBody>
+        </p:sp>
+        <p:sp>
+          <p:nvSpPr>
+            <p:cNvPr id="10" name="角丸四角形 9"/>
+            <p:cNvSpPr/>
+            <p:nvPr/>
+          </p:nvSpPr>
+          <p:spPr>
+            <a:xfrm>
+              <a:off x="2357306" y="2509707"/>
+              <a:ext cx="503339" cy="503339"/>
+            </a:xfrm>
+            <a:prstGeom prst="roundRect">
+              <a:avLst>
+                <a:gd name="adj" fmla="val 10000"/>
+              </a:avLst>
+            </a:prstGeom>
+            <a:noFill/>
+            <a:ln w="19050">
+              <a:solidFill>
+                <a:schemeClr val="tx1"/>
+              </a:solidFill>
+            </a:ln>
+          </p:spPr>
+          <p:style>
+            <a:lnRef idx="2">
+              <a:schemeClr val="accent1">
+                <a:shade val="50000"/>
+              </a:schemeClr>
+            </a:lnRef>
+            <a:fillRef idx="1">
+              <a:schemeClr val="accent1"/>
+            </a:fillRef>
+            <a:effectRef idx="0">
+              <a:schemeClr val="accent1"/>
+            </a:effectRef>
+            <a:fontRef idx="minor">
+              <a:schemeClr val="lt1"/>
+            </a:fontRef>
+          </p:style>
+          <p:txBody>
+            <a:bodyPr rtlCol="0" anchor="ctr"/>
+            <a:lstStyle/>
+            <a:p>
+              <a:pPr algn="ctr"/>
+              <a:r>
+                <a:rPr lang="en-US" altLang="ja-JP" sz="2400" b="1" dirty="0" smtClean="0">
+                  <a:solidFill>
+                    <a:schemeClr val="tx1"/>
+                  </a:solidFill>
+                </a:rPr>
+                <a:t>S</a:t>
+              </a:r>
+              <a:endParaRPr kumimoji="1" lang="ja-JP" altLang="en-US" sz="2400" b="1" dirty="0">
+                <a:solidFill>
+                  <a:schemeClr val="tx1"/>
+                </a:solidFill>
+              </a:endParaRPr>
+            </a:p>
+          </p:txBody>
+        </p:sp>
+        <p:sp>
+          <p:nvSpPr>
+            <p:cNvPr id="11" name="角丸四角形 10"/>
+            <p:cNvSpPr/>
+            <p:nvPr/>
+          </p:nvSpPr>
+          <p:spPr>
+            <a:xfrm>
+              <a:off x="2357306" y="3115113"/>
+              <a:ext cx="503339" cy="503339"/>
+            </a:xfrm>
+            <a:prstGeom prst="roundRect">
+              <a:avLst>
+                <a:gd name="adj" fmla="val 10000"/>
+              </a:avLst>
+            </a:prstGeom>
+            <a:noFill/>
+            <a:ln w="19050">
+              <a:solidFill>
+                <a:schemeClr val="tx1"/>
+              </a:solidFill>
+            </a:ln>
+          </p:spPr>
+          <p:style>
+            <a:lnRef idx="2">
+              <a:schemeClr val="accent1">
+                <a:shade val="50000"/>
+              </a:schemeClr>
+            </a:lnRef>
+            <a:fillRef idx="1">
+              <a:schemeClr val="accent1"/>
+            </a:fillRef>
+            <a:effectRef idx="0">
+              <a:schemeClr val="accent1"/>
+            </a:effectRef>
+            <a:fontRef idx="minor">
+              <a:schemeClr val="lt1"/>
+            </a:fontRef>
+          </p:style>
+          <p:txBody>
+            <a:bodyPr rtlCol="0" anchor="ctr"/>
+            <a:lstStyle/>
+            <a:p>
+              <a:pPr algn="ctr"/>
+              <a:r>
+                <a:rPr lang="en-US" altLang="ja-JP" sz="2400" b="1" dirty="0" smtClean="0">
+                  <a:solidFill>
+                    <a:schemeClr val="tx1"/>
+                  </a:solidFill>
+                </a:rPr>
+                <a:t>D</a:t>
+              </a:r>
+              <a:endParaRPr kumimoji="1" lang="ja-JP" altLang="en-US" sz="2400" b="1" dirty="0">
+                <a:solidFill>
+                  <a:schemeClr val="tx1"/>
+                </a:solidFill>
+              </a:endParaRPr>
+            </a:p>
+          </p:txBody>
+        </p:sp>
+        <p:sp>
+          <p:nvSpPr>
+            <p:cNvPr id="12" name="角丸四角形 11"/>
+            <p:cNvSpPr/>
+            <p:nvPr/>
+          </p:nvSpPr>
+          <p:spPr>
+            <a:xfrm>
+              <a:off x="2357305" y="3720519"/>
+              <a:ext cx="503339" cy="503339"/>
+            </a:xfrm>
+            <a:prstGeom prst="roundRect">
+              <a:avLst>
+                <a:gd name="adj" fmla="val 10000"/>
+              </a:avLst>
+            </a:prstGeom>
+            <a:noFill/>
+            <a:ln w="19050">
+              <a:solidFill>
+                <a:schemeClr val="tx1"/>
+              </a:solidFill>
+            </a:ln>
+          </p:spPr>
+          <p:style>
+            <a:lnRef idx="2">
+              <a:schemeClr val="accent1">
+                <a:shade val="50000"/>
+              </a:schemeClr>
+            </a:lnRef>
+            <a:fillRef idx="1">
+              <a:schemeClr val="accent1"/>
+            </a:fillRef>
+            <a:effectRef idx="0">
+              <a:schemeClr val="accent1"/>
+            </a:effectRef>
+            <a:fontRef idx="minor">
+              <a:schemeClr val="lt1"/>
+            </a:fontRef>
+          </p:style>
+          <p:txBody>
+            <a:bodyPr rtlCol="0" anchor="ctr"/>
+            <a:lstStyle/>
+            <a:p>
+              <a:pPr algn="ctr"/>
+              <a:r>
+                <a:rPr lang="en-US" altLang="ja-JP" sz="2400" b="1" dirty="0" smtClean="0">
+                  <a:solidFill>
+                    <a:schemeClr val="tx1"/>
+                  </a:solidFill>
+                </a:rPr>
+                <a:t>A</a:t>
+              </a:r>
+              <a:endParaRPr kumimoji="1" lang="ja-JP" altLang="en-US" sz="2400" b="1" dirty="0">
+                <a:solidFill>
+                  <a:schemeClr val="tx1"/>
+                </a:solidFill>
+              </a:endParaRPr>
+            </a:p>
+          </p:txBody>
+        </p:sp>
+        <p:sp>
+          <p:nvSpPr>
+            <p:cNvPr id="13" name="角丸四角形 12"/>
+            <p:cNvSpPr/>
+            <p:nvPr/>
+          </p:nvSpPr>
+          <p:spPr>
+            <a:xfrm>
+              <a:off x="2165757" y="4340604"/>
+              <a:ext cx="871058" cy="503339"/>
+            </a:xfrm>
+            <a:prstGeom prst="roundRect">
+              <a:avLst>
+                <a:gd name="adj" fmla="val 10000"/>
+              </a:avLst>
+            </a:prstGeom>
+            <a:noFill/>
+            <a:ln w="19050">
+              <a:solidFill>
+                <a:schemeClr val="tx1"/>
+              </a:solidFill>
+            </a:ln>
+          </p:spPr>
+          <p:style>
+            <a:lnRef idx="2">
+              <a:schemeClr val="accent1">
+                <a:shade val="50000"/>
+              </a:schemeClr>
+            </a:lnRef>
+            <a:fillRef idx="1">
+              <a:schemeClr val="accent1"/>
+            </a:fillRef>
+            <a:effectRef idx="0">
+              <a:schemeClr val="accent1"/>
+            </a:effectRef>
+            <a:fontRef idx="minor">
+              <a:schemeClr val="lt1"/>
+            </a:fontRef>
+          </p:style>
+          <p:txBody>
+            <a:bodyPr rtlCol="0" anchor="ctr"/>
+            <a:lstStyle/>
+            <a:p>
+              <a:pPr algn="ctr"/>
+              <a:r>
+                <a:rPr kumimoji="1" lang="en-US" altLang="ja-JP" sz="2000" b="1" dirty="0" smtClean="0">
+                  <a:solidFill>
+                    <a:schemeClr val="tx1"/>
+                  </a:solidFill>
+                </a:rPr>
+                <a:t>Shift</a:t>
+              </a:r>
+              <a:endParaRPr kumimoji="1" lang="ja-JP" altLang="en-US" sz="2000" b="1" dirty="0">
+                <a:solidFill>
+                  <a:schemeClr val="tx1"/>
+                </a:solidFill>
+              </a:endParaRPr>
+            </a:p>
+          </p:txBody>
+        </p:sp>
+        <p:sp>
+          <p:nvSpPr>
+            <p:cNvPr id="14" name="角丸四角形 13"/>
+            <p:cNvSpPr/>
+            <p:nvPr/>
+          </p:nvSpPr>
+          <p:spPr>
+            <a:xfrm>
+              <a:off x="2357305" y="4960689"/>
+              <a:ext cx="503339" cy="503339"/>
+            </a:xfrm>
+            <a:prstGeom prst="roundRect">
+              <a:avLst>
+                <a:gd name="adj" fmla="val 10000"/>
+              </a:avLst>
+            </a:prstGeom>
+            <a:noFill/>
+            <a:ln w="19050">
+              <a:solidFill>
+                <a:schemeClr val="tx1"/>
+              </a:solidFill>
+            </a:ln>
+          </p:spPr>
+          <p:style>
+            <a:lnRef idx="2">
+              <a:schemeClr val="accent1">
+                <a:shade val="50000"/>
+              </a:schemeClr>
+            </a:lnRef>
+            <a:fillRef idx="1">
+              <a:schemeClr val="accent1"/>
+            </a:fillRef>
+            <a:effectRef idx="0">
+              <a:schemeClr val="accent1"/>
+            </a:effectRef>
+            <a:fontRef idx="minor">
+              <a:schemeClr val="lt1"/>
+            </a:fontRef>
+          </p:style>
+          <p:txBody>
+            <a:bodyPr rtlCol="0" anchor="ctr"/>
+            <a:lstStyle/>
+            <a:p>
+              <a:pPr algn="ctr"/>
+              <a:r>
+                <a:rPr lang="en-US" altLang="ja-JP" sz="2400" b="1" dirty="0" smtClean="0">
+                  <a:solidFill>
+                    <a:schemeClr val="tx1"/>
+                  </a:solidFill>
+                </a:rPr>
+                <a:t>R</a:t>
+              </a:r>
+              <a:endParaRPr kumimoji="1" lang="ja-JP" altLang="en-US" sz="2400" b="1" dirty="0">
+                <a:solidFill>
+                  <a:schemeClr val="tx1"/>
+                </a:solidFill>
+              </a:endParaRPr>
+            </a:p>
+          </p:txBody>
+        </p:sp>
+        <p:sp>
+          <p:nvSpPr>
+            <p:cNvPr id="51" name="テキスト ボックス 50"/>
+            <p:cNvSpPr txBox="1"/>
+            <p:nvPr/>
+          </p:nvSpPr>
+          <p:spPr>
+            <a:xfrm>
+              <a:off x="2994870" y="1972693"/>
+              <a:ext cx="956345" cy="400110"/>
+            </a:xfrm>
+            <a:prstGeom prst="rect">
+              <a:avLst/>
+            </a:prstGeom>
+            <a:noFill/>
+          </p:spPr>
+          <p:txBody>
+            <a:bodyPr wrap="square" rtlCol="0">
+              <a:spAutoFit/>
+            </a:bodyPr>
+            <a:lstStyle/>
+            <a:p>
+              <a:r>
+                <a:rPr kumimoji="1" lang="ja-JP" altLang="en-US" sz="2000" b="1" dirty="0" smtClean="0"/>
+                <a:t>：前進</a:t>
+              </a:r>
+              <a:endParaRPr kumimoji="1" lang="ja-JP" altLang="en-US" sz="2000" b="1" dirty="0"/>
+            </a:p>
+          </p:txBody>
+        </p:sp>
+        <p:sp>
+          <p:nvSpPr>
+            <p:cNvPr id="52" name="テキスト ボックス 51"/>
+            <p:cNvSpPr txBox="1"/>
+            <p:nvPr/>
+          </p:nvSpPr>
+          <p:spPr>
+            <a:xfrm>
+              <a:off x="2994870" y="2586488"/>
+              <a:ext cx="956345" cy="400110"/>
+            </a:xfrm>
+            <a:prstGeom prst="rect">
+              <a:avLst/>
+            </a:prstGeom>
+            <a:noFill/>
+          </p:spPr>
+          <p:txBody>
+            <a:bodyPr wrap="square" rtlCol="0">
+              <a:spAutoFit/>
+            </a:bodyPr>
+            <a:lstStyle/>
+            <a:p>
+              <a:r>
+                <a:rPr kumimoji="1" lang="ja-JP" altLang="en-US" sz="2000" b="1" dirty="0" smtClean="0"/>
+                <a:t>：後退</a:t>
+              </a:r>
+              <a:endParaRPr kumimoji="1" lang="ja-JP" altLang="en-US" sz="2000" b="1" dirty="0"/>
+            </a:p>
+          </p:txBody>
+        </p:sp>
+        <p:sp>
+          <p:nvSpPr>
+            <p:cNvPr id="53" name="テキスト ボックス 52"/>
+            <p:cNvSpPr txBox="1"/>
+            <p:nvPr/>
+          </p:nvSpPr>
+          <p:spPr>
+            <a:xfrm>
+              <a:off x="3003259" y="3200283"/>
+              <a:ext cx="1208014" cy="400110"/>
+            </a:xfrm>
+            <a:prstGeom prst="rect">
+              <a:avLst/>
+            </a:prstGeom>
+            <a:noFill/>
+          </p:spPr>
+          <p:txBody>
+            <a:bodyPr wrap="square" rtlCol="0">
+              <a:spAutoFit/>
+            </a:bodyPr>
+            <a:lstStyle/>
+            <a:p>
+              <a:r>
+                <a:rPr kumimoji="1" lang="ja-JP" altLang="en-US" sz="2000" b="1" dirty="0" smtClean="0"/>
+                <a:t>：右回転</a:t>
+              </a:r>
+              <a:endParaRPr kumimoji="1" lang="ja-JP" altLang="en-US" sz="2000" b="1" dirty="0"/>
+            </a:p>
+          </p:txBody>
+        </p:sp>
+        <p:sp>
+          <p:nvSpPr>
+            <p:cNvPr id="54" name="テキスト ボックス 53"/>
+            <p:cNvSpPr txBox="1"/>
+            <p:nvPr/>
+          </p:nvSpPr>
+          <p:spPr>
+            <a:xfrm>
+              <a:off x="3003259" y="3815359"/>
+              <a:ext cx="1208014" cy="400110"/>
+            </a:xfrm>
+            <a:prstGeom prst="rect">
+              <a:avLst/>
+            </a:prstGeom>
+            <a:noFill/>
+          </p:spPr>
+          <p:txBody>
+            <a:bodyPr wrap="square" rtlCol="0">
+              <a:spAutoFit/>
+            </a:bodyPr>
+            <a:lstStyle/>
+            <a:p>
+              <a:r>
+                <a:rPr kumimoji="1" lang="ja-JP" altLang="en-US" sz="2000" b="1" dirty="0" smtClean="0"/>
+                <a:t>：左回転</a:t>
+              </a:r>
+              <a:endParaRPr kumimoji="1" lang="ja-JP" altLang="en-US" sz="2000" b="1" dirty="0"/>
+            </a:p>
+          </p:txBody>
+        </p:sp>
+        <p:sp>
+          <p:nvSpPr>
+            <p:cNvPr id="55" name="テキスト ボックス 54"/>
+            <p:cNvSpPr txBox="1"/>
+            <p:nvPr/>
+          </p:nvSpPr>
+          <p:spPr>
+            <a:xfrm>
+              <a:off x="3003259" y="4420883"/>
+              <a:ext cx="1484851" cy="400110"/>
+            </a:xfrm>
+            <a:prstGeom prst="rect">
+              <a:avLst/>
+            </a:prstGeom>
+            <a:noFill/>
+          </p:spPr>
+          <p:txBody>
+            <a:bodyPr wrap="square" rtlCol="0">
+              <a:spAutoFit/>
+            </a:bodyPr>
+            <a:lstStyle/>
+            <a:p>
+              <a:r>
+                <a:rPr kumimoji="1" lang="ja-JP" altLang="en-US" sz="2000" b="1" dirty="0" smtClean="0"/>
+                <a:t>：ダッシュ</a:t>
+              </a:r>
+              <a:endParaRPr kumimoji="1" lang="ja-JP" altLang="en-US" sz="2000" b="1" dirty="0"/>
+            </a:p>
+          </p:txBody>
+        </p:sp>
+        <p:sp>
+          <p:nvSpPr>
+            <p:cNvPr id="56" name="テキスト ボックス 55"/>
+            <p:cNvSpPr txBox="1"/>
+            <p:nvPr/>
+          </p:nvSpPr>
+          <p:spPr>
+            <a:xfrm>
+              <a:off x="2994870" y="5049357"/>
+              <a:ext cx="1728132" cy="400110"/>
+            </a:xfrm>
+            <a:prstGeom prst="rect">
+              <a:avLst/>
+            </a:prstGeom>
+            <a:noFill/>
+          </p:spPr>
+          <p:txBody>
+            <a:bodyPr wrap="square" rtlCol="0">
+              <a:spAutoFit/>
+            </a:bodyPr>
+            <a:lstStyle/>
+            <a:p>
+              <a:r>
+                <a:rPr kumimoji="1" lang="ja-JP" altLang="en-US" sz="2000" b="1" dirty="0" smtClean="0"/>
+                <a:t>：リスタート</a:t>
+              </a:r>
+              <a:endParaRPr kumimoji="1" lang="ja-JP" altLang="en-US" sz="2000" b="1" dirty="0"/>
+            </a:p>
+          </p:txBody>
+        </p:sp>
+        <p:cxnSp>
+          <p:nvCxnSpPr>
+            <p:cNvPr id="57" name="直線コネクタ 56"/>
+            <p:cNvCxnSpPr/>
+            <p:nvPr/>
+          </p:nvCxnSpPr>
+          <p:spPr>
+            <a:xfrm>
+              <a:off x="3095625" y="2452688"/>
+              <a:ext cx="2152650" cy="394"/>
+            </a:xfrm>
+            <a:prstGeom prst="line">
+              <a:avLst/>
+            </a:prstGeom>
+            <a:ln w="12700">
+              <a:solidFill>
+                <a:srgbClr val="66AA59"/>
+              </a:solidFill>
+              <a:prstDash val="sysDash"/>
+            </a:ln>
+          </p:spPr>
+          <p:style>
+            <a:lnRef idx="1">
+              <a:schemeClr val="accent1"/>
+            </a:lnRef>
+            <a:fillRef idx="0">
+              <a:schemeClr val="accent1"/>
+            </a:fillRef>
+            <a:effectRef idx="0">
+              <a:schemeClr val="accent1"/>
+            </a:effectRef>
+            <a:fontRef idx="minor">
+              <a:schemeClr val="tx1"/>
+            </a:fontRef>
+          </p:style>
+        </p:cxnSp>
+        <p:cxnSp>
+          <p:nvCxnSpPr>
+            <p:cNvPr id="58" name="直線コネクタ 57"/>
+            <p:cNvCxnSpPr/>
+            <p:nvPr/>
+          </p:nvCxnSpPr>
+          <p:spPr>
+            <a:xfrm>
+              <a:off x="3095625" y="3063882"/>
+              <a:ext cx="2152650" cy="394"/>
+            </a:xfrm>
+            <a:prstGeom prst="line">
+              <a:avLst/>
+            </a:prstGeom>
+            <a:ln w="12700">
+              <a:solidFill>
+                <a:srgbClr val="66AA59"/>
+              </a:solidFill>
+              <a:prstDash val="sysDash"/>
+            </a:ln>
+          </p:spPr>
+          <p:style>
+            <a:lnRef idx="1">
+              <a:schemeClr val="accent1"/>
+            </a:lnRef>
+            <a:fillRef idx="0">
+              <a:schemeClr val="accent1"/>
+            </a:fillRef>
+            <a:effectRef idx="0">
+              <a:schemeClr val="accent1"/>
+            </a:effectRef>
+            <a:fontRef idx="minor">
+              <a:schemeClr val="tx1"/>
+            </a:fontRef>
+          </p:style>
+        </p:cxnSp>
+        <p:cxnSp>
+          <p:nvCxnSpPr>
+            <p:cNvPr id="59" name="直線コネクタ 58"/>
+            <p:cNvCxnSpPr/>
+            <p:nvPr/>
+          </p:nvCxnSpPr>
+          <p:spPr>
+            <a:xfrm>
+              <a:off x="3095625" y="3675076"/>
+              <a:ext cx="2152650" cy="394"/>
+            </a:xfrm>
+            <a:prstGeom prst="line">
+              <a:avLst/>
+            </a:prstGeom>
+            <a:ln w="12700">
+              <a:solidFill>
+                <a:srgbClr val="66AA59"/>
+              </a:solidFill>
+              <a:prstDash val="sysDash"/>
+            </a:ln>
+          </p:spPr>
+          <p:style>
+            <a:lnRef idx="1">
+              <a:schemeClr val="accent1"/>
+            </a:lnRef>
+            <a:fillRef idx="0">
+              <a:schemeClr val="accent1"/>
+            </a:fillRef>
+            <a:effectRef idx="0">
+              <a:schemeClr val="accent1"/>
+            </a:effectRef>
+            <a:fontRef idx="minor">
+              <a:schemeClr val="tx1"/>
+            </a:fontRef>
+          </p:style>
+        </p:cxnSp>
+        <p:cxnSp>
+          <p:nvCxnSpPr>
+            <p:cNvPr id="60" name="直線コネクタ 59"/>
+            <p:cNvCxnSpPr/>
+            <p:nvPr/>
+          </p:nvCxnSpPr>
+          <p:spPr>
+            <a:xfrm>
+              <a:off x="3095625" y="4281523"/>
+              <a:ext cx="2152650" cy="394"/>
+            </a:xfrm>
+            <a:prstGeom prst="line">
+              <a:avLst/>
+            </a:prstGeom>
+            <a:ln w="12700">
+              <a:solidFill>
+                <a:srgbClr val="66AA59"/>
+              </a:solidFill>
+              <a:prstDash val="sysDash"/>
+            </a:ln>
+          </p:spPr>
+          <p:style>
+            <a:lnRef idx="1">
+              <a:schemeClr val="accent1"/>
+            </a:lnRef>
+            <a:fillRef idx="0">
+              <a:schemeClr val="accent1"/>
+            </a:fillRef>
+            <a:effectRef idx="0">
+              <a:schemeClr val="accent1"/>
+            </a:effectRef>
+            <a:fontRef idx="minor">
+              <a:schemeClr val="tx1"/>
+            </a:fontRef>
+          </p:style>
+        </p:cxnSp>
+        <p:cxnSp>
+          <p:nvCxnSpPr>
+            <p:cNvPr id="61" name="直線コネクタ 60"/>
+            <p:cNvCxnSpPr/>
+            <p:nvPr/>
+          </p:nvCxnSpPr>
+          <p:spPr>
+            <a:xfrm>
+              <a:off x="3095625" y="4887970"/>
+              <a:ext cx="2152650" cy="394"/>
+            </a:xfrm>
+            <a:prstGeom prst="line">
+              <a:avLst/>
+            </a:prstGeom>
+            <a:ln w="12700">
+              <a:solidFill>
+                <a:srgbClr val="66AA59"/>
+              </a:solidFill>
+              <a:prstDash val="sysDash"/>
+            </a:ln>
+          </p:spPr>
+          <p:style>
+            <a:lnRef idx="1">
+              <a:schemeClr val="accent1"/>
+            </a:lnRef>
+            <a:fillRef idx="0">
+              <a:schemeClr val="accent1"/>
+            </a:fillRef>
+            <a:effectRef idx="0">
+              <a:schemeClr val="accent1"/>
+            </a:effectRef>
+            <a:fontRef idx="minor">
+              <a:schemeClr val="tx1"/>
+            </a:fontRef>
+          </p:style>
+        </p:cxnSp>
+        <p:cxnSp>
+          <p:nvCxnSpPr>
+            <p:cNvPr id="62" name="直線コネクタ 61"/>
+            <p:cNvCxnSpPr/>
+            <p:nvPr/>
+          </p:nvCxnSpPr>
+          <p:spPr>
+            <a:xfrm>
+              <a:off x="3095625" y="5494417"/>
+              <a:ext cx="2152650" cy="394"/>
+            </a:xfrm>
+            <a:prstGeom prst="line">
+              <a:avLst/>
+            </a:prstGeom>
+            <a:ln w="12700">
+              <a:solidFill>
+                <a:srgbClr val="66AA59"/>
+              </a:solidFill>
+              <a:prstDash val="sysDash"/>
+            </a:ln>
+          </p:spPr>
+          <p:style>
+            <a:lnRef idx="1">
+              <a:schemeClr val="accent1"/>
+            </a:lnRef>
+            <a:fillRef idx="0">
+              <a:schemeClr val="accent1"/>
+            </a:fillRef>
+            <a:effectRef idx="0">
+              <a:schemeClr val="accent1"/>
+            </a:effectRef>
+            <a:fontRef idx="minor">
+              <a:schemeClr val="tx1"/>
+            </a:fontRef>
+          </p:style>
+        </p:cxnSp>
+        <p:cxnSp>
+          <p:nvCxnSpPr>
+            <p:cNvPr id="63" name="直線コネクタ 62"/>
+            <p:cNvCxnSpPr/>
+            <p:nvPr/>
+          </p:nvCxnSpPr>
+          <p:spPr>
+            <a:xfrm>
+              <a:off x="6000681" y="3120822"/>
+              <a:ext cx="4162494" cy="0"/>
+            </a:xfrm>
+            <a:prstGeom prst="line">
+              <a:avLst/>
+            </a:prstGeom>
+            <a:ln w="12700">
+              <a:solidFill>
+                <a:srgbClr val="66AA59"/>
+              </a:solidFill>
+              <a:prstDash val="sysDash"/>
+            </a:ln>
+          </p:spPr>
+          <p:style>
+            <a:lnRef idx="1">
+              <a:schemeClr val="accent1"/>
+            </a:lnRef>
+            <a:fillRef idx="0">
+              <a:schemeClr val="accent1"/>
+            </a:fillRef>
+            <a:effectRef idx="0">
+              <a:schemeClr val="accent1"/>
+            </a:effectRef>
+            <a:fontRef idx="minor">
+              <a:schemeClr val="tx1"/>
+            </a:fontRef>
+          </p:style>
+        </p:cxnSp>
+        <p:cxnSp>
+          <p:nvCxnSpPr>
+            <p:cNvPr id="65" name="直線コネクタ 64"/>
+            <p:cNvCxnSpPr/>
+            <p:nvPr/>
+          </p:nvCxnSpPr>
+          <p:spPr>
+            <a:xfrm flipH="1">
+              <a:off x="5705475" y="1347801"/>
+              <a:ext cx="1201" cy="4248137"/>
+            </a:xfrm>
+            <a:prstGeom prst="line">
+              <a:avLst/>
+            </a:prstGeom>
+            <a:ln w="12700">
+              <a:solidFill>
+                <a:srgbClr val="66AA59"/>
+              </a:solidFill>
+              <a:prstDash val="sysDash"/>
+            </a:ln>
+          </p:spPr>
+          <p:style>
+            <a:lnRef idx="1">
+              <a:schemeClr val="accent1"/>
+            </a:lnRef>
+            <a:fillRef idx="0">
+              <a:schemeClr val="accent1"/>
+            </a:fillRef>
+            <a:effectRef idx="0">
+              <a:schemeClr val="accent1"/>
+            </a:effectRef>
+            <a:fontRef idx="minor">
+              <a:schemeClr val="tx1"/>
+            </a:fontRef>
+          </p:style>
+        </p:cxnSp>
+        <p:sp>
+          <p:nvSpPr>
+            <p:cNvPr id="66" name="テキスト ボックス 65"/>
+            <p:cNvSpPr txBox="1"/>
+            <p:nvPr/>
+          </p:nvSpPr>
+          <p:spPr>
+            <a:xfrm>
+              <a:off x="5918609" y="1866175"/>
+              <a:ext cx="4577418" cy="1754326"/>
+            </a:xfrm>
+            <a:prstGeom prst="rect">
+              <a:avLst/>
+            </a:prstGeom>
+            <a:noFill/>
+          </p:spPr>
+          <p:txBody>
+            <a:bodyPr wrap="square" rtlCol="0">
+              <a:spAutoFit/>
+            </a:bodyPr>
+            <a:lstStyle/>
+            <a:p>
+              <a:r>
+                <a:rPr kumimoji="1" lang="ja-JP" altLang="en-US" b="1" dirty="0" smtClean="0"/>
+                <a:t>・ダッシュはスタミナを消費する</a:t>
+              </a:r>
+              <a:endParaRPr kumimoji="1" lang="en-US" altLang="ja-JP" b="1" dirty="0" smtClean="0"/>
+            </a:p>
+            <a:p>
+              <a:r>
+                <a:rPr lang="ja-JP" altLang="en-US" b="1" dirty="0" smtClean="0"/>
+                <a:t>・</a:t>
+              </a:r>
+              <a:r>
+                <a:rPr lang="ja-JP" altLang="en-US" b="1" dirty="0"/>
+                <a:t>スタミナは時間経過で少しずつ回復</a:t>
+              </a:r>
+              <a:r>
+                <a:rPr lang="ja-JP" altLang="en-US" b="1" dirty="0" smtClean="0"/>
+                <a:t>する</a:t>
+              </a:r>
+              <a:endParaRPr lang="en-US" altLang="ja-JP" b="1" dirty="0" smtClean="0"/>
+            </a:p>
+            <a:p>
+              <a:r>
+                <a:rPr lang="ja-JP" altLang="en-US" b="1" dirty="0" smtClean="0"/>
+                <a:t>・</a:t>
+              </a:r>
+              <a:r>
+                <a:rPr lang="ja-JP" altLang="en-US" b="1" dirty="0"/>
+                <a:t>スタミナが０になると</a:t>
+              </a:r>
+              <a:endParaRPr lang="en-US" altLang="ja-JP" b="1" dirty="0"/>
+            </a:p>
+            <a:p>
+              <a:r>
+                <a:rPr lang="ja-JP" altLang="en-US" b="1" dirty="0" smtClean="0"/>
+                <a:t>　全回復</a:t>
+              </a:r>
+              <a:r>
+                <a:rPr lang="ja-JP" altLang="en-US" b="1" dirty="0"/>
+                <a:t>するまで移動操作ができなくなる</a:t>
+              </a:r>
+              <a:endParaRPr lang="en-US" altLang="ja-JP" b="1" dirty="0"/>
+            </a:p>
+            <a:p>
+              <a:endParaRPr lang="en-US" altLang="ja-JP" b="1" dirty="0"/>
+            </a:p>
+            <a:p>
+              <a:endParaRPr kumimoji="1" lang="en-US" altLang="ja-JP" b="1" dirty="0" smtClean="0"/>
+            </a:p>
+          </p:txBody>
+        </p:sp>
+        <p:sp>
+          <p:nvSpPr>
+            <p:cNvPr id="35" name="テキスト ボックス 34"/>
+            <p:cNvSpPr txBox="1"/>
+            <p:nvPr/>
+          </p:nvSpPr>
+          <p:spPr>
+            <a:xfrm>
+              <a:off x="5859885" y="3778826"/>
+              <a:ext cx="4627751" cy="2308324"/>
+            </a:xfrm>
+            <a:prstGeom prst="rect">
+              <a:avLst/>
+            </a:prstGeom>
+            <a:noFill/>
+          </p:spPr>
+          <p:txBody>
+            <a:bodyPr wrap="square" rtlCol="0">
+              <a:spAutoFit/>
+            </a:bodyPr>
+            <a:lstStyle>
+              <a:defPPr>
+                <a:defRPr lang="ja-JP"/>
+              </a:defPPr>
+              <a:lvl1pPr>
+                <a:defRPr b="1"/>
+              </a:lvl1pPr>
+            </a:lstStyle>
+            <a:p>
+              <a:r>
+                <a:rPr lang="ja-JP" altLang="en-US" sz="1600" dirty="0"/>
+                <a:t>自転車を操作し、プレイヤーを落とさず</a:t>
+              </a:r>
+              <a:r>
+                <a:rPr lang="ja-JP" altLang="en-US" sz="1600" dirty="0" smtClean="0"/>
+                <a:t>に</a:t>
+              </a:r>
+              <a:endParaRPr lang="en-US" altLang="ja-JP" sz="1600" dirty="0" smtClean="0"/>
+            </a:p>
+            <a:p>
+              <a:r>
+                <a:rPr lang="ja-JP" altLang="en-US" sz="1600" dirty="0" smtClean="0"/>
+                <a:t>ギミック</a:t>
+              </a:r>
+              <a:r>
+                <a:rPr lang="ja-JP" altLang="en-US" sz="1600" dirty="0"/>
+                <a:t>を突破</a:t>
+              </a:r>
+              <a:r>
+                <a:rPr lang="ja-JP" altLang="en-US" sz="1600" dirty="0" smtClean="0"/>
+                <a:t>して</a:t>
+              </a:r>
+              <a:endParaRPr lang="en-US" altLang="ja-JP" sz="1600" dirty="0" smtClean="0"/>
+            </a:p>
+            <a:p>
+              <a:r>
+                <a:rPr lang="ja-JP" altLang="en-US" sz="1600" dirty="0" smtClean="0"/>
+                <a:t>ゴール</a:t>
+              </a:r>
+              <a:r>
+                <a:rPr lang="ja-JP" altLang="en-US" sz="1600" dirty="0"/>
+                <a:t>を</a:t>
+              </a:r>
+              <a:r>
+                <a:rPr lang="ja-JP" altLang="en-US" sz="1600" dirty="0" smtClean="0"/>
+                <a:t>目指すアクションゲーム。</a:t>
+              </a:r>
+              <a:endParaRPr lang="en-US" altLang="ja-JP" sz="1600" dirty="0" smtClean="0"/>
+            </a:p>
+            <a:p>
+              <a:r>
+                <a:rPr lang="ja-JP" altLang="en-US" sz="1600" dirty="0" smtClean="0"/>
+                <a:t>プレイヤー</a:t>
+              </a:r>
+              <a:r>
+                <a:rPr lang="ja-JP" altLang="en-US" sz="1600" dirty="0"/>
+                <a:t>がゴールラインを越える</a:t>
+              </a:r>
+              <a:r>
+                <a:rPr lang="ja-JP" altLang="en-US" sz="1600" dirty="0" smtClean="0"/>
+                <a:t>と</a:t>
+              </a:r>
+              <a:endParaRPr lang="en-US" altLang="ja-JP" sz="1600" dirty="0" smtClean="0"/>
+            </a:p>
+            <a:p>
+              <a:r>
+                <a:rPr lang="ja-JP" altLang="en-US" sz="1600" dirty="0" smtClean="0"/>
+                <a:t>クリア</a:t>
+              </a:r>
+              <a:r>
+                <a:rPr lang="ja-JP" altLang="en-US" sz="1600" dirty="0"/>
+                <a:t>となり、赤い床や天井に触れる</a:t>
+              </a:r>
+              <a:r>
+                <a:rPr lang="ja-JP" altLang="en-US" sz="1600" dirty="0" smtClean="0"/>
+                <a:t>、</a:t>
+              </a:r>
+              <a:endParaRPr lang="en-US" altLang="ja-JP" sz="1600" dirty="0" smtClean="0"/>
+            </a:p>
+            <a:p>
+              <a:r>
+                <a:rPr lang="ja-JP" altLang="en-US" sz="1600" dirty="0" smtClean="0"/>
+                <a:t>プレイヤー</a:t>
+              </a:r>
+              <a:r>
+                <a:rPr lang="ja-JP" altLang="en-US" sz="1600" dirty="0"/>
+                <a:t>が落下する</a:t>
+              </a:r>
+              <a:r>
+                <a:rPr lang="ja-JP" altLang="en-US" sz="1600" dirty="0" smtClean="0"/>
+                <a:t>、</a:t>
+              </a:r>
+              <a:endParaRPr lang="en-US" altLang="ja-JP" sz="1600" dirty="0"/>
+            </a:p>
+            <a:p>
+              <a:r>
+                <a:rPr lang="ja-JP" altLang="en-US" sz="1600" dirty="0" smtClean="0"/>
+                <a:t>また</a:t>
+              </a:r>
+              <a:r>
+                <a:rPr lang="ja-JP" altLang="en-US" sz="1600" dirty="0"/>
+                <a:t>は時間切れになるとゲームオーバーとなる。</a:t>
+              </a:r>
+            </a:p>
+            <a:p>
+              <a:endParaRPr lang="en-US" altLang="ja-JP" sz="1600" dirty="0"/>
+            </a:p>
+            <a:p>
+              <a:endParaRPr lang="en-US" altLang="ja-JP" sz="1600" dirty="0"/>
+            </a:p>
+          </p:txBody>
+        </p:sp>
+        <p:sp>
+          <p:nvSpPr>
+            <p:cNvPr id="36" name="角丸四角形 35"/>
+            <p:cNvSpPr/>
+            <p:nvPr/>
+          </p:nvSpPr>
+          <p:spPr>
+            <a:xfrm>
+              <a:off x="7214533" y="3257725"/>
+              <a:ext cx="1644241" cy="360727"/>
+            </a:xfrm>
+            <a:prstGeom prst="roundRect">
+              <a:avLst>
+                <a:gd name="adj" fmla="val 50000"/>
+              </a:avLst>
+            </a:prstGeom>
+            <a:solidFill>
+              <a:srgbClr val="025228"/>
+            </a:solidFill>
+            <a:ln>
+              <a:noFill/>
+            </a:ln>
+          </p:spPr>
+          <p:style>
+            <a:lnRef idx="2">
+              <a:schemeClr val="accent1">
+                <a:shade val="50000"/>
+              </a:schemeClr>
+            </a:lnRef>
+            <a:fillRef idx="1">
+              <a:schemeClr val="accent1"/>
+            </a:fillRef>
+            <a:effectRef idx="0">
+              <a:schemeClr val="accent1"/>
+            </a:effectRef>
+            <a:fontRef idx="minor">
+              <a:schemeClr val="lt1"/>
+            </a:fontRef>
+          </p:style>
+          <p:txBody>
+            <a:bodyPr rtlCol="0" anchor="ctr"/>
+            <a:lstStyle/>
+            <a:p>
+              <a:pPr algn="ctr"/>
+              <a:r>
+                <a:rPr lang="ja-JP" altLang="en-US" sz="2000" b="1" dirty="0" smtClean="0"/>
+                <a:t>ゲーム内容</a:t>
+              </a:r>
+              <a:endParaRPr kumimoji="1" lang="ja-JP" altLang="en-US" sz="2000" b="1" dirty="0"/>
+            </a:p>
+          </p:txBody>
+        </p:sp>
+      </p:grpSp>
     </p:spTree>
     <p:extLst>
       <p:ext uri="{BB962C8B-B14F-4D97-AF65-F5344CB8AC3E}">

--- a/操作説明.pptx
+++ b/操作説明.pptx
@@ -5,8 +5,7 @@
     <p:sldMasterId id="2147483648" r:id="rId1"/>
   </p:sldMasterIdLst>
   <p:sldIdLst>
-    <p:sldId id="257" r:id="rId2"/>
-    <p:sldId id="259" r:id="rId3"/>
+    <p:sldId id="259" r:id="rId2"/>
   </p:sldIdLst>
   <p:sldSz cx="12192000" cy="6858000"/>
   <p:notesSz cx="6858000" cy="9144000"/>
@@ -244,7 +243,7 @@
           <a:p>
             <a:fld id="{2481FDF4-B71F-434F-B80C-6D5CDAFBF3C6}" type="datetimeFigureOut">
               <a:rPr kumimoji="1" lang="ja-JP" altLang="en-US" smtClean="0"/>
-              <a:t>2026/6/30</a:t>
+              <a:t>2026/7/27</a:t>
             </a:fld>
             <a:endParaRPr kumimoji="1" lang="ja-JP" altLang="en-US"/>
           </a:p>
@@ -446,7 +445,7 @@
           <a:p>
             <a:fld id="{2481FDF4-B71F-434F-B80C-6D5CDAFBF3C6}" type="datetimeFigureOut">
               <a:rPr kumimoji="1" lang="ja-JP" altLang="en-US" smtClean="0"/>
-              <a:t>2026/6/30</a:t>
+              <a:t>2026/7/27</a:t>
             </a:fld>
             <a:endParaRPr kumimoji="1" lang="ja-JP" altLang="en-US"/>
           </a:p>
@@ -658,7 +657,7 @@
           <a:p>
             <a:fld id="{2481FDF4-B71F-434F-B80C-6D5CDAFBF3C6}" type="datetimeFigureOut">
               <a:rPr kumimoji="1" lang="ja-JP" altLang="en-US" smtClean="0"/>
-              <a:t>2026/6/30</a:t>
+              <a:t>2026/7/27</a:t>
             </a:fld>
             <a:endParaRPr kumimoji="1" lang="ja-JP" altLang="en-US"/>
           </a:p>
@@ -860,7 +859,7 @@
           <a:p>
             <a:fld id="{2481FDF4-B71F-434F-B80C-6D5CDAFBF3C6}" type="datetimeFigureOut">
               <a:rPr kumimoji="1" lang="ja-JP" altLang="en-US" smtClean="0"/>
-              <a:t>2026/6/30</a:t>
+              <a:t>2026/7/27</a:t>
             </a:fld>
             <a:endParaRPr kumimoji="1" lang="ja-JP" altLang="en-US"/>
           </a:p>
@@ -1106,7 +1105,7 @@
           <a:p>
             <a:fld id="{2481FDF4-B71F-434F-B80C-6D5CDAFBF3C6}" type="datetimeFigureOut">
               <a:rPr kumimoji="1" lang="ja-JP" altLang="en-US" smtClean="0"/>
-              <a:t>2026/6/30</a:t>
+              <a:t>2026/7/27</a:t>
             </a:fld>
             <a:endParaRPr kumimoji="1" lang="ja-JP" altLang="en-US"/>
           </a:p>
@@ -1402,7 +1401,7 @@
           <a:p>
             <a:fld id="{2481FDF4-B71F-434F-B80C-6D5CDAFBF3C6}" type="datetimeFigureOut">
               <a:rPr kumimoji="1" lang="ja-JP" altLang="en-US" smtClean="0"/>
-              <a:t>2026/6/30</a:t>
+              <a:t>2026/7/27</a:t>
             </a:fld>
             <a:endParaRPr kumimoji="1" lang="ja-JP" altLang="en-US"/>
           </a:p>
@@ -1833,7 +1832,7 @@
           <a:p>
             <a:fld id="{2481FDF4-B71F-434F-B80C-6D5CDAFBF3C6}" type="datetimeFigureOut">
               <a:rPr kumimoji="1" lang="ja-JP" altLang="en-US" smtClean="0"/>
-              <a:t>2026/6/30</a:t>
+              <a:t>2026/7/27</a:t>
             </a:fld>
             <a:endParaRPr kumimoji="1" lang="ja-JP" altLang="en-US"/>
           </a:p>
@@ -1951,7 +1950,7 @@
           <a:p>
             <a:fld id="{2481FDF4-B71F-434F-B80C-6D5CDAFBF3C6}" type="datetimeFigureOut">
               <a:rPr kumimoji="1" lang="ja-JP" altLang="en-US" smtClean="0"/>
-              <a:t>2026/6/30</a:t>
+              <a:t>2026/7/27</a:t>
             </a:fld>
             <a:endParaRPr kumimoji="1" lang="ja-JP" altLang="en-US"/>
           </a:p>
@@ -2046,7 +2045,7 @@
           <a:p>
             <a:fld id="{2481FDF4-B71F-434F-B80C-6D5CDAFBF3C6}" type="datetimeFigureOut">
               <a:rPr kumimoji="1" lang="ja-JP" altLang="en-US" smtClean="0"/>
-              <a:t>2026/6/30</a:t>
+              <a:t>2026/7/27</a:t>
             </a:fld>
             <a:endParaRPr kumimoji="1" lang="ja-JP" altLang="en-US"/>
           </a:p>
@@ -2355,7 +2354,7 @@
           <a:p>
             <a:fld id="{2481FDF4-B71F-434F-B80C-6D5CDAFBF3C6}" type="datetimeFigureOut">
               <a:rPr kumimoji="1" lang="ja-JP" altLang="en-US" smtClean="0"/>
-              <a:t>2026/6/30</a:t>
+              <a:t>2026/7/27</a:t>
             </a:fld>
             <a:endParaRPr kumimoji="1" lang="ja-JP" altLang="en-US"/>
           </a:p>
@@ -2608,7 +2607,7 @@
           <a:p>
             <a:fld id="{2481FDF4-B71F-434F-B80C-6D5CDAFBF3C6}" type="datetimeFigureOut">
               <a:rPr kumimoji="1" lang="ja-JP" altLang="en-US" smtClean="0"/>
-              <a:t>2026/6/30</a:t>
+              <a:t>2026/7/27</a:t>
             </a:fld>
             <a:endParaRPr kumimoji="1" lang="ja-JP" altLang="en-US"/>
           </a:p>
@@ -2853,7 +2852,7 @@
           <a:p>
             <a:fld id="{2481FDF4-B71F-434F-B80C-6D5CDAFBF3C6}" type="datetimeFigureOut">
               <a:rPr kumimoji="1" lang="ja-JP" altLang="en-US" smtClean="0"/>
-              <a:t>2026/6/30</a:t>
+              <a:t>2026/7/27</a:t>
             </a:fld>
             <a:endParaRPr kumimoji="1" lang="ja-JP" altLang="en-US"/>
           </a:p>
@@ -3242,188 +3241,6 @@
 </file>
 
 <file path=ppt/slides/slide1.xml><?xml version="1.0" encoding="utf-8"?>
-<p:sld xmlns:a="http://schemas.openxmlformats.org/drawingml/2006/main" xmlns:r="http://schemas.openxmlformats.org/officeDocument/2006/relationships" xmlns:p="http://schemas.openxmlformats.org/presentationml/2006/main">
-  <p:cSld>
-    <p:spTree>
-      <p:nvGrpSpPr>
-        <p:cNvPr id="1" name=""/>
-        <p:cNvGrpSpPr/>
-        <p:nvPr/>
-      </p:nvGrpSpPr>
-      <p:grpSpPr>
-        <a:xfrm>
-          <a:off x="0" y="0"/>
-          <a:ext cx="0" cy="0"/>
-          <a:chOff x="0" y="0"/>
-          <a:chExt cx="0" cy="0"/>
-        </a:xfrm>
-      </p:grpSpPr>
-      <p:sp>
-        <p:nvSpPr>
-          <p:cNvPr id="2" name="タイトル 1"/>
-          <p:cNvSpPr>
-            <a:spLocks noGrp="1"/>
-          </p:cNvSpPr>
-          <p:nvPr>
-            <p:ph type="title"/>
-          </p:nvPr>
-        </p:nvSpPr>
-        <p:spPr/>
-        <p:txBody>
-          <a:bodyPr>
-            <a:normAutofit/>
-          </a:bodyPr>
-          <a:lstStyle/>
-          <a:p>
-            <a:r>
-              <a:rPr kumimoji="1" lang="ja-JP" altLang="en-US" sz="6000" b="1" dirty="0" smtClean="0"/>
-              <a:t>操作方法＆説明</a:t>
-            </a:r>
-            <a:endParaRPr kumimoji="1" lang="ja-JP" altLang="en-US" sz="6000" b="1" dirty="0"/>
-          </a:p>
-        </p:txBody>
-      </p:sp>
-      <p:sp>
-        <p:nvSpPr>
-          <p:cNvPr id="5" name="テキスト ボックス 4"/>
-          <p:cNvSpPr txBox="1"/>
-          <p:nvPr/>
-        </p:nvSpPr>
-        <p:spPr>
-          <a:xfrm>
-            <a:off x="838200" y="1690688"/>
-            <a:ext cx="11049000" cy="4832092"/>
-          </a:xfrm>
-          <a:prstGeom prst="rect">
-            <a:avLst/>
-          </a:prstGeom>
-          <a:noFill/>
-        </p:spPr>
-        <p:txBody>
-          <a:bodyPr wrap="square" rtlCol="0">
-            <a:spAutoFit/>
-          </a:bodyPr>
-          <a:lstStyle/>
-          <a:p>
-            <a:r>
-              <a:rPr lang="en-US" altLang="ja-JP" sz="2800" dirty="0"/>
-              <a:t>W</a:t>
-            </a:r>
-            <a:r>
-              <a:rPr lang="ja-JP" altLang="en-US" sz="2800" dirty="0"/>
-              <a:t>：前進</a:t>
-            </a:r>
-            <a:endParaRPr lang="en-US" altLang="ja-JP" sz="2800" dirty="0"/>
-          </a:p>
-          <a:p>
-            <a:r>
-              <a:rPr lang="en-US" altLang="ja-JP" sz="2800" dirty="0" smtClean="0"/>
-              <a:t>S </a:t>
-            </a:r>
-            <a:r>
-              <a:rPr lang="ja-JP" altLang="en-US" sz="2800" dirty="0" smtClean="0"/>
-              <a:t>：後退</a:t>
-            </a:r>
-            <a:endParaRPr lang="en-US" altLang="ja-JP" sz="2800" dirty="0" smtClean="0"/>
-          </a:p>
-          <a:p>
-            <a:r>
-              <a:rPr lang="en-US" altLang="ja-JP" sz="2800" dirty="0" smtClean="0"/>
-              <a:t>D</a:t>
-            </a:r>
-            <a:r>
-              <a:rPr lang="ja-JP" altLang="en-US" sz="2800" dirty="0" smtClean="0"/>
-              <a:t>：</a:t>
-            </a:r>
-            <a:r>
-              <a:rPr lang="ja-JP" altLang="en-US" sz="2800" dirty="0"/>
-              <a:t>右回転</a:t>
-            </a:r>
-            <a:endParaRPr lang="en-US" altLang="ja-JP" sz="2800" dirty="0"/>
-          </a:p>
-          <a:p>
-            <a:r>
-              <a:rPr lang="en-US" altLang="ja-JP" sz="2800" dirty="0" smtClean="0"/>
-              <a:t>A</a:t>
-            </a:r>
-            <a:r>
-              <a:rPr lang="ja-JP" altLang="en-US" sz="2800" dirty="0" smtClean="0"/>
-              <a:t>：左回転</a:t>
-            </a:r>
-            <a:endParaRPr lang="en-US" altLang="ja-JP" sz="2800" dirty="0" smtClean="0"/>
-          </a:p>
-          <a:p>
-            <a:r>
-              <a:rPr lang="en-US" altLang="ja-JP" sz="2800" dirty="0"/>
-              <a:t>Shift</a:t>
-            </a:r>
-            <a:r>
-              <a:rPr lang="ja-JP" altLang="en-US" sz="2800" dirty="0" smtClean="0"/>
-              <a:t>：加速</a:t>
-            </a:r>
-            <a:endParaRPr lang="en-US" altLang="ja-JP" sz="2800" dirty="0" smtClean="0"/>
-          </a:p>
-          <a:p>
-            <a:r>
-              <a:rPr lang="en-US" altLang="ja-JP" sz="2800" dirty="0" smtClean="0"/>
-              <a:t>R</a:t>
-            </a:r>
-            <a:r>
-              <a:rPr lang="ja-JP" altLang="en-US" sz="2800" dirty="0" smtClean="0"/>
-              <a:t>：リスタート</a:t>
-            </a:r>
-            <a:endParaRPr lang="en-US" altLang="ja-JP" sz="2800" dirty="0" smtClean="0"/>
-          </a:p>
-          <a:p>
-            <a:endParaRPr lang="en-US" altLang="ja-JP" sz="2800" dirty="0"/>
-          </a:p>
-          <a:p>
-            <a:r>
-              <a:rPr lang="ja-JP" altLang="en-US" sz="2800" dirty="0" smtClean="0"/>
-              <a:t>ダッシュはスタミナ</a:t>
-            </a:r>
-            <a:r>
-              <a:rPr lang="ja-JP" altLang="en-US" sz="2800" dirty="0"/>
-              <a:t>を消費する</a:t>
-            </a:r>
-            <a:endParaRPr lang="en-US" altLang="ja-JP" sz="2800" dirty="0"/>
-          </a:p>
-          <a:p>
-            <a:r>
-              <a:rPr lang="ja-JP" altLang="en-US" sz="2800" dirty="0" smtClean="0"/>
-              <a:t>スタミナ</a:t>
-            </a:r>
-            <a:r>
-              <a:rPr lang="ja-JP" altLang="en-US" sz="2800" dirty="0"/>
-              <a:t>は時間経過で少しずつ回復する</a:t>
-            </a:r>
-            <a:endParaRPr lang="en-US" altLang="ja-JP" sz="2800" dirty="0"/>
-          </a:p>
-          <a:p>
-            <a:r>
-              <a:rPr lang="ja-JP" altLang="en-US" sz="2800" dirty="0"/>
-              <a:t>スタミナが０になると全回復するまで操作ができなくなる</a:t>
-            </a:r>
-          </a:p>
-          <a:p>
-            <a:endParaRPr kumimoji="1" lang="ja-JP" altLang="en-US" sz="2800" dirty="0"/>
-          </a:p>
-        </p:txBody>
-      </p:sp>
-    </p:spTree>
-    <p:extLst>
-      <p:ext uri="{BB962C8B-B14F-4D97-AF65-F5344CB8AC3E}">
-        <p14:creationId xmlns:p14="http://schemas.microsoft.com/office/powerpoint/2010/main" val="3868511702"/>
-      </p:ext>
-    </p:extLst>
-  </p:cSld>
-  <p:clrMapOvr>
-    <a:masterClrMapping/>
-  </p:clrMapOvr>
-</p:sld>
-</file>
-
-<file path=ppt/slides/slide2.xml><?xml version="1.0" encoding="utf-8"?>
 <p:sld xmlns:a="http://schemas.openxmlformats.org/drawingml/2006/main" xmlns:r="http://schemas.openxmlformats.org/officeDocument/2006/relationships" xmlns:p="http://schemas.openxmlformats.org/presentationml/2006/main">
   <p:cSld>
     <p:spTree>
